--- a/Documentos/Proyecto V1.1.pptx
+++ b/Documentos/Proyecto V1.1.pptx
@@ -25,17 +25,16 @@
     <p:sldId id="270" r:id="rId21"/>
     <p:sldId id="271" r:id="rId22"/>
     <p:sldId id="272" r:id="rId23"/>
-    <p:sldId id="273" r:id="rId24"/>
   </p:sldIdLst>
   <p:sldSz cy="6858000" cx="12192000"/>
   <p:notesSz cx="6858000" cy="9144000"/>
   <p:embeddedFontLst>
     <p:embeddedFont>
       <p:font typeface="Work Sans Medium"/>
-      <p:regular r:id="rId25"/>
-      <p:bold r:id="rId26"/>
-      <p:italic r:id="rId27"/>
-      <p:boldItalic r:id="rId28"/>
+      <p:regular r:id="rId24"/>
+      <p:bold r:id="rId25"/>
+      <p:italic r:id="rId26"/>
+      <p:boldItalic r:id="rId27"/>
     </p:embeddedFont>
   </p:embeddedFontLst>
   <p:defaultTextStyle>
@@ -288,7 +287,7 @@
       </p15:sldGuideLst>
     </p:ext>
     <p:ext uri="GoogleSlidesCustomDataVersion2">
-      <go:slidesCustomData xmlns:go="http://customooxmlschemas.google.com/" r:id="rId29" roundtripDataSignature="AMtx7mgVsKKCBJXn14e4tnOdKd3ZkHj8Iw=="/>
+      <go:slidesCustomData xmlns:go="http://customooxmlschemas.google.com/" r:id="rId28" roundtripDataSignature="AMtx7mieeIGvuSIB1EpWjDvcU225yX9ZvA=="/>
     </p:ext>
   </p:extLst>
 </p:presentation>
@@ -1844,7 +1843,7 @@
   <p:cSld>
     <p:spTree>
       <p:nvGrpSpPr>
-        <p:cNvPr id="182" name="Shape 182"/>
+        <p:cNvPr id="184" name="Shape 184"/>
         <p:cNvGrpSpPr/>
         <p:nvPr/>
       </p:nvGrpSpPr>
@@ -1858,7 +1857,7 @@
       </p:grpSpPr>
       <p:sp>
         <p:nvSpPr>
-          <p:cNvPr id="183" name="Google Shape;183;p9:notes"/>
+          <p:cNvPr id="185" name="Google Shape;185;p12:notes"/>
           <p:cNvSpPr txBox="1"/>
           <p:nvPr>
             <p:ph idx="1" type="body"/>
@@ -1905,7 +1904,7 @@
       </p:sp>
       <p:sp>
         <p:nvSpPr>
-          <p:cNvPr id="184" name="Google Shape;184;p9:notes"/>
+          <p:cNvPr id="186" name="Google Shape;186;p12:notes"/>
           <p:cNvSpPr/>
           <p:nvPr>
             <p:ph idx="2" type="sldImg"/>
@@ -1961,7 +1960,7 @@
   <p:cSld>
     <p:spTree>
       <p:nvGrpSpPr>
-        <p:cNvPr id="192" name="Shape 192"/>
+        <p:cNvPr id="190" name="Shape 190"/>
         <p:cNvGrpSpPr/>
         <p:nvPr/>
       </p:nvGrpSpPr>
@@ -1975,7 +1974,52 @@
       </p:grpSpPr>
       <p:sp>
         <p:nvSpPr>
-          <p:cNvPr id="193" name="Google Shape;193;p12:notes"/>
+          <p:cNvPr id="191" name="Google Shape;191;g3b0cc1124e2_0_0:notes"/>
+          <p:cNvSpPr/>
+          <p:nvPr>
+            <p:ph idx="2" type="sldImg"/>
+          </p:nvPr>
+        </p:nvSpPr>
+        <p:spPr>
+          <a:xfrm>
+            <a:off x="685800" y="1143000"/>
+            <a:ext cx="5486400" cy="3086100"/>
+          </a:xfrm>
+          <a:custGeom>
+            <a:rect b="b" l="l" r="r" t="t"/>
+            <a:pathLst>
+              <a:path extrusionOk="0" h="120000" w="120000">
+                <a:moveTo>
+                  <a:pt x="0" y="0"/>
+                </a:moveTo>
+                <a:lnTo>
+                  <a:pt x="120000" y="0"/>
+                </a:lnTo>
+                <a:lnTo>
+                  <a:pt x="120000" y="120000"/>
+                </a:lnTo>
+                <a:lnTo>
+                  <a:pt x="0" y="120000"/>
+                </a:lnTo>
+                <a:close/>
+              </a:path>
+            </a:pathLst>
+          </a:custGeom>
+          <a:noFill/>
+          <a:ln cap="flat" cmpd="sng" w="12700">
+            <a:solidFill>
+              <a:srgbClr val="000000"/>
+            </a:solidFill>
+            <a:prstDash val="solid"/>
+            <a:round/>
+            <a:headEnd len="sm" w="sm" type="none"/>
+            <a:tailEnd len="sm" w="sm" type="none"/>
+          </a:ln>
+        </p:spPr>
+      </p:sp>
+      <p:sp>
+        <p:nvSpPr>
+          <p:cNvPr id="192" name="Google Shape;192;g3b0cc1124e2_0_0:notes"/>
           <p:cNvSpPr txBox="1"/>
           <p:nvPr>
             <p:ph idx="1" type="body"/>
@@ -1984,7 +2028,7 @@
         <p:spPr>
           <a:xfrm>
             <a:off x="685800" y="4400550"/>
-            <a:ext cx="5486400" cy="3600450"/>
+            <a:ext cx="5486400" cy="3600600"/>
           </a:xfrm>
           <a:prstGeom prst="rect">
             <a:avLst/>
@@ -2022,7 +2066,131 @@
       </p:sp>
       <p:sp>
         <p:nvSpPr>
-          <p:cNvPr id="194" name="Google Shape;194;p12:notes"/>
+          <p:cNvPr id="193" name="Google Shape;193;g3b0cc1124e2_0_0:notes"/>
+          <p:cNvSpPr txBox="1"/>
+          <p:nvPr>
+            <p:ph idx="12" type="sldNum"/>
+          </p:nvPr>
+        </p:nvSpPr>
+        <p:spPr>
+          <a:xfrm>
+            <a:off x="3884613" y="8685213"/>
+            <a:ext cx="2971800" cy="458700"/>
+          </a:xfrm>
+          <a:prstGeom prst="rect">
+            <a:avLst/>
+          </a:prstGeom>
+          <a:noFill/>
+          <a:ln>
+            <a:noFill/>
+          </a:ln>
+        </p:spPr>
+        <p:txBody>
+          <a:bodyPr anchorCtr="0" anchor="b" bIns="45700" lIns="91425" spcFirstLastPara="1" rIns="91425" wrap="square" tIns="45700">
+            <a:noAutofit/>
+          </a:bodyPr>
+          <a:lstStyle/>
+          <a:p>
+            <a:pPr indent="0" lvl="0" marL="0" rtl="0" algn="r">
+              <a:lnSpc>
+                <a:spcPct val="100000"/>
+              </a:lnSpc>
+              <a:spcBef>
+                <a:spcPts val="0"/>
+              </a:spcBef>
+              <a:spcAft>
+                <a:spcPts val="0"/>
+              </a:spcAft>
+              <a:buClr>
+                <a:srgbClr val="000000"/>
+              </a:buClr>
+              <a:buSzPts val="1400"/>
+              <a:buFont typeface="Arial"/>
+              <a:buNone/>
+            </a:pPr>
+            <a:fld id="{00000000-1234-1234-1234-123412341234}" type="slidenum">
+              <a:rPr lang="en-US"/>
+              <a:t>‹#›</a:t>
+            </a:fld>
+            <a:endParaRPr/>
+          </a:p>
+        </p:txBody>
+      </p:sp>
+    </p:spTree>
+  </p:cSld>
+  <p:clrMapOvr>
+    <a:masterClrMapping/>
+  </p:clrMapOvr>
+</p:notes>
+</file>
+
+<file path=ppt/notesSlides/notesSlide12.xml><?xml version="1.0" encoding="utf-8"?>
+<p:notes xmlns:a="http://schemas.openxmlformats.org/drawingml/2006/main" xmlns:r="http://schemas.openxmlformats.org/officeDocument/2006/relationships" xmlns:mc="http://schemas.openxmlformats.org/markup-compatibility/2006" xmlns:mv="urn:schemas-microsoft-com:mac:vml" xmlns:p="http://schemas.openxmlformats.org/presentationml/2006/main" xmlns:c="http://schemas.openxmlformats.org/drawingml/2006/chart" xmlns:dgm="http://schemas.openxmlformats.org/drawingml/2006/diagram" xmlns:o="urn:schemas-microsoft-com:office:office" xmlns:v="urn:schemas-microsoft-com:vml" xmlns:pvml="urn:schemas-microsoft-com:office:powerpoint" xmlns:com="http://schemas.openxmlformats.org/drawingml/2006/compatibility" xmlns:p14="http://schemas.microsoft.com/office/powerpoint/2010/main" xmlns:p15="http://schemas.microsoft.com/office/powerpoint/2012/main" xmlns:ahyp="http://schemas.microsoft.com/office/drawing/2018/hyperlinkcolor" showMasterPhAnim="0" showMasterSp="0">
+  <p:cSld>
+    <p:spTree>
+      <p:nvGrpSpPr>
+        <p:cNvPr id="196" name="Shape 196"/>
+        <p:cNvGrpSpPr/>
+        <p:nvPr/>
+      </p:nvGrpSpPr>
+      <p:grpSpPr>
+        <a:xfrm>
+          <a:off x="0" y="0"/>
+          <a:ext cx="0" cy="0"/>
+          <a:chOff x="0" y="0"/>
+          <a:chExt cx="0" cy="0"/>
+        </a:xfrm>
+      </p:grpSpPr>
+      <p:sp>
+        <p:nvSpPr>
+          <p:cNvPr id="197" name="Google Shape;197;g391c78eebce_0_4:notes"/>
+          <p:cNvSpPr txBox="1"/>
+          <p:nvPr>
+            <p:ph idx="1" type="body"/>
+          </p:nvPr>
+        </p:nvSpPr>
+        <p:spPr>
+          <a:xfrm>
+            <a:off x="685800" y="4400550"/>
+            <a:ext cx="5486400" cy="3600600"/>
+          </a:xfrm>
+          <a:prstGeom prst="rect">
+            <a:avLst/>
+          </a:prstGeom>
+          <a:noFill/>
+          <a:ln>
+            <a:noFill/>
+          </a:ln>
+        </p:spPr>
+        <p:txBody>
+          <a:bodyPr anchorCtr="0" anchor="t" bIns="45700" lIns="91425" spcFirstLastPara="1" rIns="91425" wrap="square" tIns="45700">
+            <a:noAutofit/>
+          </a:bodyPr>
+          <a:lstStyle/>
+          <a:p>
+            <a:pPr indent="0" lvl="0" marL="0" rtl="0" algn="l">
+              <a:lnSpc>
+                <a:spcPct val="100000"/>
+              </a:lnSpc>
+              <a:spcBef>
+                <a:spcPts val="0"/>
+              </a:spcBef>
+              <a:spcAft>
+                <a:spcPts val="0"/>
+              </a:spcAft>
+              <a:buSzPts val="1400"/>
+              <a:buNone/>
+            </a:pPr>
+            <a:r>
+              <a:t/>
+            </a:r>
+            <a:endParaRPr/>
+          </a:p>
+        </p:txBody>
+      </p:sp>
+      <p:sp>
+        <p:nvSpPr>
+          <p:cNvPr id="198" name="Google Shape;198;g391c78eebce_0_4:notes"/>
           <p:cNvSpPr/>
           <p:nvPr>
             <p:ph idx="2" type="sldImg"/>
@@ -2073,12 +2241,12 @@
 </p:notes>
 </file>
 
-<file path=ppt/notesSlides/notesSlide12.xml><?xml version="1.0" encoding="utf-8"?>
+<file path=ppt/notesSlides/notesSlide13.xml><?xml version="1.0" encoding="utf-8"?>
 <p:notes xmlns:a="http://schemas.openxmlformats.org/drawingml/2006/main" xmlns:r="http://schemas.openxmlformats.org/officeDocument/2006/relationships" xmlns:mc="http://schemas.openxmlformats.org/markup-compatibility/2006" xmlns:mv="urn:schemas-microsoft-com:mac:vml" xmlns:p="http://schemas.openxmlformats.org/presentationml/2006/main" xmlns:c="http://schemas.openxmlformats.org/drawingml/2006/chart" xmlns:dgm="http://schemas.openxmlformats.org/drawingml/2006/diagram" xmlns:o="urn:schemas-microsoft-com:office:office" xmlns:v="urn:schemas-microsoft-com:vml" xmlns:pvml="urn:schemas-microsoft-com:office:powerpoint" xmlns:com="http://schemas.openxmlformats.org/drawingml/2006/compatibility" xmlns:p14="http://schemas.microsoft.com/office/powerpoint/2010/main" xmlns:p15="http://schemas.microsoft.com/office/powerpoint/2012/main" xmlns:ahyp="http://schemas.microsoft.com/office/drawing/2018/hyperlinkcolor" showMasterPhAnim="0" showMasterSp="0">
   <p:cSld>
     <p:spTree>
       <p:nvGrpSpPr>
-        <p:cNvPr id="198" name="Shape 198"/>
+        <p:cNvPr id="202" name="Shape 202"/>
         <p:cNvGrpSpPr/>
         <p:nvPr/>
       </p:nvGrpSpPr>
@@ -2092,52 +2260,7 @@
       </p:grpSpPr>
       <p:sp>
         <p:nvSpPr>
-          <p:cNvPr id="199" name="Google Shape;199;g3b0cc1124e2_0_0:notes"/>
-          <p:cNvSpPr/>
-          <p:nvPr>
-            <p:ph idx="2" type="sldImg"/>
-          </p:nvPr>
-        </p:nvSpPr>
-        <p:spPr>
-          <a:xfrm>
-            <a:off x="685800" y="1143000"/>
-            <a:ext cx="5486400" cy="3086100"/>
-          </a:xfrm>
-          <a:custGeom>
-            <a:rect b="b" l="l" r="r" t="t"/>
-            <a:pathLst>
-              <a:path extrusionOk="0" h="120000" w="120000">
-                <a:moveTo>
-                  <a:pt x="0" y="0"/>
-                </a:moveTo>
-                <a:lnTo>
-                  <a:pt x="120000" y="0"/>
-                </a:lnTo>
-                <a:lnTo>
-                  <a:pt x="120000" y="120000"/>
-                </a:lnTo>
-                <a:lnTo>
-                  <a:pt x="0" y="120000"/>
-                </a:lnTo>
-                <a:close/>
-              </a:path>
-            </a:pathLst>
-          </a:custGeom>
-          <a:noFill/>
-          <a:ln cap="flat" cmpd="sng" w="12700">
-            <a:solidFill>
-              <a:srgbClr val="000000"/>
-            </a:solidFill>
-            <a:prstDash val="solid"/>
-            <a:round/>
-            <a:headEnd len="sm" w="sm" type="none"/>
-            <a:tailEnd len="sm" w="sm" type="none"/>
-          </a:ln>
-        </p:spPr>
-      </p:sp>
-      <p:sp>
-        <p:nvSpPr>
-          <p:cNvPr id="200" name="Google Shape;200;g3b0cc1124e2_0_0:notes"/>
+          <p:cNvPr id="203" name="Google Shape;203;g391c78eebce_0_9:notes"/>
           <p:cNvSpPr txBox="1"/>
           <p:nvPr>
             <p:ph idx="1" type="body"/>
@@ -2184,131 +2307,7 @@
       </p:sp>
       <p:sp>
         <p:nvSpPr>
-          <p:cNvPr id="201" name="Google Shape;201;g3b0cc1124e2_0_0:notes"/>
-          <p:cNvSpPr txBox="1"/>
-          <p:nvPr>
-            <p:ph idx="12" type="sldNum"/>
-          </p:nvPr>
-        </p:nvSpPr>
-        <p:spPr>
-          <a:xfrm>
-            <a:off x="3884613" y="8685213"/>
-            <a:ext cx="2971800" cy="458700"/>
-          </a:xfrm>
-          <a:prstGeom prst="rect">
-            <a:avLst/>
-          </a:prstGeom>
-          <a:noFill/>
-          <a:ln>
-            <a:noFill/>
-          </a:ln>
-        </p:spPr>
-        <p:txBody>
-          <a:bodyPr anchorCtr="0" anchor="b" bIns="45700" lIns="91425" spcFirstLastPara="1" rIns="91425" wrap="square" tIns="45700">
-            <a:noAutofit/>
-          </a:bodyPr>
-          <a:lstStyle/>
-          <a:p>
-            <a:pPr indent="0" lvl="0" marL="0" rtl="0" algn="r">
-              <a:lnSpc>
-                <a:spcPct val="100000"/>
-              </a:lnSpc>
-              <a:spcBef>
-                <a:spcPts val="0"/>
-              </a:spcBef>
-              <a:spcAft>
-                <a:spcPts val="0"/>
-              </a:spcAft>
-              <a:buClr>
-                <a:srgbClr val="000000"/>
-              </a:buClr>
-              <a:buSzPts val="1400"/>
-              <a:buFont typeface="Arial"/>
-              <a:buNone/>
-            </a:pPr>
-            <a:fld id="{00000000-1234-1234-1234-123412341234}" type="slidenum">
-              <a:rPr lang="en-US"/>
-              <a:t>‹#›</a:t>
-            </a:fld>
-            <a:endParaRPr/>
-          </a:p>
-        </p:txBody>
-      </p:sp>
-    </p:spTree>
-  </p:cSld>
-  <p:clrMapOvr>
-    <a:masterClrMapping/>
-  </p:clrMapOvr>
-</p:notes>
-</file>
-
-<file path=ppt/notesSlides/notesSlide13.xml><?xml version="1.0" encoding="utf-8"?>
-<p:notes xmlns:a="http://schemas.openxmlformats.org/drawingml/2006/main" xmlns:r="http://schemas.openxmlformats.org/officeDocument/2006/relationships" xmlns:mc="http://schemas.openxmlformats.org/markup-compatibility/2006" xmlns:mv="urn:schemas-microsoft-com:mac:vml" xmlns:p="http://schemas.openxmlformats.org/presentationml/2006/main" xmlns:c="http://schemas.openxmlformats.org/drawingml/2006/chart" xmlns:dgm="http://schemas.openxmlformats.org/drawingml/2006/diagram" xmlns:o="urn:schemas-microsoft-com:office:office" xmlns:v="urn:schemas-microsoft-com:vml" xmlns:pvml="urn:schemas-microsoft-com:office:powerpoint" xmlns:com="http://schemas.openxmlformats.org/drawingml/2006/compatibility" xmlns:p14="http://schemas.microsoft.com/office/powerpoint/2010/main" xmlns:p15="http://schemas.microsoft.com/office/powerpoint/2012/main" xmlns:ahyp="http://schemas.microsoft.com/office/drawing/2018/hyperlinkcolor" showMasterPhAnim="0" showMasterSp="0">
-  <p:cSld>
-    <p:spTree>
-      <p:nvGrpSpPr>
-        <p:cNvPr id="204" name="Shape 204"/>
-        <p:cNvGrpSpPr/>
-        <p:nvPr/>
-      </p:nvGrpSpPr>
-      <p:grpSpPr>
-        <a:xfrm>
-          <a:off x="0" y="0"/>
-          <a:ext cx="0" cy="0"/>
-          <a:chOff x="0" y="0"/>
-          <a:chExt cx="0" cy="0"/>
-        </a:xfrm>
-      </p:grpSpPr>
-      <p:sp>
-        <p:nvSpPr>
-          <p:cNvPr id="205" name="Google Shape;205;g391c78eebce_0_4:notes"/>
-          <p:cNvSpPr txBox="1"/>
-          <p:nvPr>
-            <p:ph idx="1" type="body"/>
-          </p:nvPr>
-        </p:nvSpPr>
-        <p:spPr>
-          <a:xfrm>
-            <a:off x="685800" y="4400550"/>
-            <a:ext cx="5486400" cy="3600600"/>
-          </a:xfrm>
-          <a:prstGeom prst="rect">
-            <a:avLst/>
-          </a:prstGeom>
-          <a:noFill/>
-          <a:ln>
-            <a:noFill/>
-          </a:ln>
-        </p:spPr>
-        <p:txBody>
-          <a:bodyPr anchorCtr="0" anchor="t" bIns="45700" lIns="91425" spcFirstLastPara="1" rIns="91425" wrap="square" tIns="45700">
-            <a:noAutofit/>
-          </a:bodyPr>
-          <a:lstStyle/>
-          <a:p>
-            <a:pPr indent="0" lvl="0" marL="0" rtl="0" algn="l">
-              <a:lnSpc>
-                <a:spcPct val="100000"/>
-              </a:lnSpc>
-              <a:spcBef>
-                <a:spcPts val="0"/>
-              </a:spcBef>
-              <a:spcAft>
-                <a:spcPts val="0"/>
-              </a:spcAft>
-              <a:buSzPts val="1400"/>
-              <a:buNone/>
-            </a:pPr>
-            <a:r>
-              <a:t/>
-            </a:r>
-            <a:endParaRPr/>
-          </a:p>
-        </p:txBody>
-      </p:sp>
-      <p:sp>
-        <p:nvSpPr>
-          <p:cNvPr id="206" name="Google Shape;206;g391c78eebce_0_4:notes"/>
+          <p:cNvPr id="204" name="Google Shape;204;g391c78eebce_0_9:notes"/>
           <p:cNvSpPr/>
           <p:nvPr>
             <p:ph idx="2" type="sldImg"/>
@@ -2364,7 +2363,7 @@
   <p:cSld>
     <p:spTree>
       <p:nvGrpSpPr>
-        <p:cNvPr id="210" name="Shape 210"/>
+        <p:cNvPr id="212" name="Shape 212"/>
         <p:cNvGrpSpPr/>
         <p:nvPr/>
       </p:nvGrpSpPr>
@@ -2378,7 +2377,7 @@
       </p:grpSpPr>
       <p:sp>
         <p:nvSpPr>
-          <p:cNvPr id="211" name="Google Shape;211;g391c78eebce_0_9:notes"/>
+          <p:cNvPr id="213" name="Google Shape;213;g391c78eebce_0_18:notes"/>
           <p:cNvSpPr txBox="1"/>
           <p:nvPr>
             <p:ph idx="1" type="body"/>
@@ -2425,7 +2424,7 @@
       </p:sp>
       <p:sp>
         <p:nvSpPr>
-          <p:cNvPr id="212" name="Google Shape;212;g391c78eebce_0_9:notes"/>
+          <p:cNvPr id="214" name="Google Shape;214;g391c78eebce_0_18:notes"/>
           <p:cNvSpPr/>
           <p:nvPr>
             <p:ph idx="2" type="sldImg"/>
@@ -2481,7 +2480,7 @@
   <p:cSld>
     <p:spTree>
       <p:nvGrpSpPr>
-        <p:cNvPr id="220" name="Shape 220"/>
+        <p:cNvPr id="218" name="Shape 218"/>
         <p:cNvGrpSpPr/>
         <p:nvPr/>
       </p:nvGrpSpPr>
@@ -2495,7 +2494,7 @@
       </p:grpSpPr>
       <p:sp>
         <p:nvSpPr>
-          <p:cNvPr id="221" name="Google Shape;221;g391c78eebce_0_18:notes"/>
+          <p:cNvPr id="219" name="Google Shape;219;p10:notes"/>
           <p:cNvSpPr txBox="1"/>
           <p:nvPr>
             <p:ph idx="1" type="body"/>
@@ -2504,7 +2503,7 @@
         <p:spPr>
           <a:xfrm>
             <a:off x="685800" y="4400550"/>
-            <a:ext cx="5486400" cy="3600600"/>
+            <a:ext cx="5486400" cy="3600450"/>
           </a:xfrm>
           <a:prstGeom prst="rect">
             <a:avLst/>
@@ -2542,7 +2541,7 @@
       </p:sp>
       <p:sp>
         <p:nvSpPr>
-          <p:cNvPr id="222" name="Google Shape;222;g391c78eebce_0_18:notes"/>
+          <p:cNvPr id="220" name="Google Shape;220;p10:notes"/>
           <p:cNvSpPr/>
           <p:nvPr>
             <p:ph idx="2" type="sldImg"/>
@@ -2598,7 +2597,7 @@
   <p:cSld>
     <p:spTree>
       <p:nvGrpSpPr>
-        <p:cNvPr id="226" name="Shape 226"/>
+        <p:cNvPr id="230" name="Shape 230"/>
         <p:cNvGrpSpPr/>
         <p:nvPr/>
       </p:nvGrpSpPr>
@@ -2612,7 +2611,7 @@
       </p:grpSpPr>
       <p:sp>
         <p:nvSpPr>
-          <p:cNvPr id="227" name="Google Shape;227;p10:notes"/>
+          <p:cNvPr id="231" name="Google Shape;231;p11:notes"/>
           <p:cNvSpPr txBox="1"/>
           <p:nvPr>
             <p:ph idx="1" type="body"/>
@@ -2659,7 +2658,7 @@
       </p:sp>
       <p:sp>
         <p:nvSpPr>
-          <p:cNvPr id="228" name="Google Shape;228;p10:notes"/>
+          <p:cNvPr id="232" name="Google Shape;232;p11:notes"/>
           <p:cNvSpPr/>
           <p:nvPr>
             <p:ph idx="2" type="sldImg"/>
@@ -2715,7 +2714,7 @@
   <p:cSld>
     <p:spTree>
       <p:nvGrpSpPr>
-        <p:cNvPr id="238" name="Shape 238"/>
+        <p:cNvPr id="242" name="Shape 242"/>
         <p:cNvGrpSpPr/>
         <p:nvPr/>
       </p:nvGrpSpPr>
@@ -2729,7 +2728,7 @@
       </p:grpSpPr>
       <p:sp>
         <p:nvSpPr>
-          <p:cNvPr id="239" name="Google Shape;239;p11:notes"/>
+          <p:cNvPr id="243" name="Google Shape;243;p15:notes"/>
           <p:cNvSpPr txBox="1"/>
           <p:nvPr>
             <p:ph idx="1" type="body"/>
@@ -2776,124 +2775,7 @@
       </p:sp>
       <p:sp>
         <p:nvSpPr>
-          <p:cNvPr id="240" name="Google Shape;240;p11:notes"/>
-          <p:cNvSpPr/>
-          <p:nvPr>
-            <p:ph idx="2" type="sldImg"/>
-          </p:nvPr>
-        </p:nvSpPr>
-        <p:spPr>
-          <a:xfrm>
-            <a:off x="685800" y="1143000"/>
-            <a:ext cx="5486400" cy="3086100"/>
-          </a:xfrm>
-          <a:custGeom>
-            <a:rect b="b" l="l" r="r" t="t"/>
-            <a:pathLst>
-              <a:path extrusionOk="0" h="120000" w="120000">
-                <a:moveTo>
-                  <a:pt x="0" y="0"/>
-                </a:moveTo>
-                <a:lnTo>
-                  <a:pt x="120000" y="0"/>
-                </a:lnTo>
-                <a:lnTo>
-                  <a:pt x="120000" y="120000"/>
-                </a:lnTo>
-                <a:lnTo>
-                  <a:pt x="0" y="120000"/>
-                </a:lnTo>
-                <a:close/>
-              </a:path>
-            </a:pathLst>
-          </a:custGeom>
-          <a:noFill/>
-          <a:ln cap="flat" cmpd="sng" w="12700">
-            <a:solidFill>
-              <a:srgbClr val="000000"/>
-            </a:solidFill>
-            <a:prstDash val="solid"/>
-            <a:round/>
-            <a:headEnd len="sm" w="sm" type="none"/>
-            <a:tailEnd len="sm" w="sm" type="none"/>
-          </a:ln>
-        </p:spPr>
-      </p:sp>
-    </p:spTree>
-  </p:cSld>
-  <p:clrMapOvr>
-    <a:masterClrMapping/>
-  </p:clrMapOvr>
-</p:notes>
-</file>
-
-<file path=ppt/notesSlides/notesSlide18.xml><?xml version="1.0" encoding="utf-8"?>
-<p:notes xmlns:a="http://schemas.openxmlformats.org/drawingml/2006/main" xmlns:r="http://schemas.openxmlformats.org/officeDocument/2006/relationships" xmlns:mc="http://schemas.openxmlformats.org/markup-compatibility/2006" xmlns:mv="urn:schemas-microsoft-com:mac:vml" xmlns:p="http://schemas.openxmlformats.org/presentationml/2006/main" xmlns:c="http://schemas.openxmlformats.org/drawingml/2006/chart" xmlns:dgm="http://schemas.openxmlformats.org/drawingml/2006/diagram" xmlns:o="urn:schemas-microsoft-com:office:office" xmlns:v="urn:schemas-microsoft-com:vml" xmlns:pvml="urn:schemas-microsoft-com:office:powerpoint" xmlns:com="http://schemas.openxmlformats.org/drawingml/2006/compatibility" xmlns:p14="http://schemas.microsoft.com/office/powerpoint/2010/main" xmlns:p15="http://schemas.microsoft.com/office/powerpoint/2012/main" xmlns:ahyp="http://schemas.microsoft.com/office/drawing/2018/hyperlinkcolor" showMasterPhAnim="0" showMasterSp="0">
-  <p:cSld>
-    <p:spTree>
-      <p:nvGrpSpPr>
-        <p:cNvPr id="250" name="Shape 250"/>
-        <p:cNvGrpSpPr/>
-        <p:nvPr/>
-      </p:nvGrpSpPr>
-      <p:grpSpPr>
-        <a:xfrm>
-          <a:off x="0" y="0"/>
-          <a:ext cx="0" cy="0"/>
-          <a:chOff x="0" y="0"/>
-          <a:chExt cx="0" cy="0"/>
-        </a:xfrm>
-      </p:grpSpPr>
-      <p:sp>
-        <p:nvSpPr>
-          <p:cNvPr id="251" name="Google Shape;251;p15:notes"/>
-          <p:cNvSpPr txBox="1"/>
-          <p:nvPr>
-            <p:ph idx="1" type="body"/>
-          </p:nvPr>
-        </p:nvSpPr>
-        <p:spPr>
-          <a:xfrm>
-            <a:off x="685800" y="4400550"/>
-            <a:ext cx="5486400" cy="3600450"/>
-          </a:xfrm>
-          <a:prstGeom prst="rect">
-            <a:avLst/>
-          </a:prstGeom>
-          <a:noFill/>
-          <a:ln>
-            <a:noFill/>
-          </a:ln>
-        </p:spPr>
-        <p:txBody>
-          <a:bodyPr anchorCtr="0" anchor="t" bIns="45700" lIns="91425" spcFirstLastPara="1" rIns="91425" wrap="square" tIns="45700">
-            <a:noAutofit/>
-          </a:bodyPr>
-          <a:lstStyle/>
-          <a:p>
-            <a:pPr indent="0" lvl="0" marL="0" rtl="0" algn="l">
-              <a:lnSpc>
-                <a:spcPct val="100000"/>
-              </a:lnSpc>
-              <a:spcBef>
-                <a:spcPts val="0"/>
-              </a:spcBef>
-              <a:spcAft>
-                <a:spcPts val="0"/>
-              </a:spcAft>
-              <a:buSzPts val="1400"/>
-              <a:buNone/>
-            </a:pPr>
-            <a:r>
-              <a:t/>
-            </a:r>
-            <a:endParaRPr/>
-          </a:p>
-        </p:txBody>
-      </p:sp>
-      <p:sp>
-        <p:nvSpPr>
-          <p:cNvPr id="252" name="Google Shape;252;p15:notes"/>
+          <p:cNvPr id="244" name="Google Shape;244;p15:notes"/>
           <p:cNvSpPr/>
           <p:nvPr>
             <p:ph idx="2" type="sldImg"/>
@@ -3704,7 +3586,8 @@
               <a:buNone/>
             </a:pPr>
             <a:r>
-              <a:t/>
+              <a:rPr lang="en-US"/>
+              <a:t>Modulos</a:t>
             </a:r>
             <a:endParaRPr/>
           </a:p>
@@ -3782,7 +3665,54 @@
       </p:grpSpPr>
       <p:sp>
         <p:nvSpPr>
-          <p:cNvPr id="175" name="Google Shape;175;g395b38490da_0_0:notes"/>
+          <p:cNvPr id="175" name="Google Shape;175;p9:notes"/>
+          <p:cNvSpPr txBox="1"/>
+          <p:nvPr>
+            <p:ph idx="1" type="body"/>
+          </p:nvPr>
+        </p:nvSpPr>
+        <p:spPr>
+          <a:xfrm>
+            <a:off x="685800" y="4400550"/>
+            <a:ext cx="5486400" cy="3600450"/>
+          </a:xfrm>
+          <a:prstGeom prst="rect">
+            <a:avLst/>
+          </a:prstGeom>
+          <a:noFill/>
+          <a:ln>
+            <a:noFill/>
+          </a:ln>
+        </p:spPr>
+        <p:txBody>
+          <a:bodyPr anchorCtr="0" anchor="t" bIns="45700" lIns="91425" spcFirstLastPara="1" rIns="91425" wrap="square" tIns="45700">
+            <a:noAutofit/>
+          </a:bodyPr>
+          <a:lstStyle/>
+          <a:p>
+            <a:pPr indent="0" lvl="0" marL="0" rtl="0" algn="l">
+              <a:lnSpc>
+                <a:spcPct val="100000"/>
+              </a:lnSpc>
+              <a:spcBef>
+                <a:spcPts val="0"/>
+              </a:spcBef>
+              <a:spcAft>
+                <a:spcPts val="0"/>
+              </a:spcAft>
+              <a:buSzPts val="1400"/>
+              <a:buNone/>
+            </a:pPr>
+            <a:r>
+              <a:t/>
+            </a:r>
+            <a:endParaRPr/>
+          </a:p>
+        </p:txBody>
+      </p:sp>
+      <p:sp>
+        <p:nvSpPr>
+          <p:cNvPr id="176" name="Google Shape;176;p9:notes"/>
           <p:cNvSpPr/>
           <p:nvPr>
             <p:ph idx="2" type="sldImg"/>
@@ -3813,91 +3743,17 @@
               </a:path>
             </a:pathLst>
           </a:custGeom>
+          <a:noFill/>
+          <a:ln cap="flat" cmpd="sng" w="12700">
+            <a:solidFill>
+              <a:srgbClr val="000000"/>
+            </a:solidFill>
+            <a:prstDash val="solid"/>
+            <a:round/>
+            <a:headEnd len="sm" w="sm" type="none"/>
+            <a:tailEnd len="sm" w="sm" type="none"/>
+          </a:ln>
         </p:spPr>
-      </p:sp>
-      <p:sp>
-        <p:nvSpPr>
-          <p:cNvPr id="176" name="Google Shape;176;g395b38490da_0_0:notes"/>
-          <p:cNvSpPr txBox="1"/>
-          <p:nvPr>
-            <p:ph idx="1" type="body"/>
-          </p:nvPr>
-        </p:nvSpPr>
-        <p:spPr>
-          <a:xfrm>
-            <a:off x="685800" y="4400550"/>
-            <a:ext cx="5486400" cy="3600600"/>
-          </a:xfrm>
-          <a:prstGeom prst="rect">
-            <a:avLst/>
-          </a:prstGeom>
-        </p:spPr>
-        <p:txBody>
-          <a:bodyPr anchorCtr="0" anchor="t" bIns="45700" lIns="91425" spcFirstLastPara="1" rIns="91425" wrap="square" tIns="45700">
-            <a:noAutofit/>
-          </a:bodyPr>
-          <a:lstStyle/>
-          <a:p>
-            <a:pPr indent="0" lvl="0" marL="0" rtl="0" algn="l">
-              <a:spcBef>
-                <a:spcPts val="0"/>
-              </a:spcBef>
-              <a:spcAft>
-                <a:spcPts val="0"/>
-              </a:spcAft>
-              <a:buNone/>
-            </a:pPr>
-            <a:r>
-              <a:t/>
-            </a:r>
-            <a:endParaRPr/>
-          </a:p>
-        </p:txBody>
-      </p:sp>
-      <p:sp>
-        <p:nvSpPr>
-          <p:cNvPr id="177" name="Google Shape;177;g395b38490da_0_0:notes"/>
-          <p:cNvSpPr txBox="1"/>
-          <p:nvPr>
-            <p:ph idx="12" type="sldNum"/>
-          </p:nvPr>
-        </p:nvSpPr>
-        <p:spPr>
-          <a:xfrm>
-            <a:off x="3884613" y="8685213"/>
-            <a:ext cx="2971800" cy="458700"/>
-          </a:xfrm>
-          <a:prstGeom prst="rect">
-            <a:avLst/>
-          </a:prstGeom>
-        </p:spPr>
-        <p:txBody>
-          <a:bodyPr anchorCtr="0" anchor="b" bIns="45700" lIns="91425" spcFirstLastPara="1" rIns="91425" wrap="square" tIns="45700">
-            <a:noAutofit/>
-          </a:bodyPr>
-          <a:lstStyle/>
-          <a:p>
-            <a:pPr indent="0" lvl="0" marL="0" rtl="0" algn="r">
-              <a:spcBef>
-                <a:spcPts val="0"/>
-              </a:spcBef>
-              <a:spcAft>
-                <a:spcPts val="0"/>
-              </a:spcAft>
-              <a:buClr>
-                <a:srgbClr val="000000"/>
-              </a:buClr>
-              <a:buSzPts val="1200"/>
-              <a:buFont typeface="Arial"/>
-              <a:buNone/>
-            </a:pPr>
-            <a:fld id="{00000000-1234-1234-1234-123412341234}" type="slidenum">
-              <a:rPr lang="en-US"/>
-              <a:t>‹#›</a:t>
-            </a:fld>
-            <a:endParaRPr/>
-          </a:p>
-        </p:txBody>
       </p:sp>
     </p:spTree>
   </p:cSld>
@@ -18187,10 +18043,7 @@
               <a:buNone/>
             </a:pPr>
             <a:r>
-              <a:rPr b="0" i="0" lang="en-US" sz="1600" u="none" cap="none" strike="noStrike">
-                <a:solidFill>
-                  <a:srgbClr val="000000"/>
-                </a:solidFill>
+              <a:rPr lang="en-US" sz="1600">
                 <a:latin typeface="Times New Roman"/>
                 <a:ea typeface="Times New Roman"/>
                 <a:cs typeface="Times New Roman"/>
@@ -18198,10 +18051,7 @@
               </a:rPr>
               <a:t>Felipe Reyes</a:t>
             </a:r>
-            <a:endParaRPr b="0" i="0" sz="1600" u="none" cap="none" strike="noStrike">
-              <a:solidFill>
-                <a:srgbClr val="000000"/>
-              </a:solidFill>
+            <a:endParaRPr sz="1600">
               <a:latin typeface="Times New Roman"/>
               <a:ea typeface="Times New Roman"/>
               <a:cs typeface="Times New Roman"/>
@@ -18227,30 +18077,15 @@
               <a:buNone/>
             </a:pPr>
             <a:r>
-              <a:rPr b="0" i="0" lang="en-US" sz="1600" u="none" cap="none" strike="noStrike">
-                <a:solidFill>
-                  <a:srgbClr val="000000"/>
-                </a:solidFill>
-                <a:latin typeface="Times New Roman"/>
-                <a:ea typeface="Times New Roman"/>
-                <a:cs typeface="Times New Roman"/>
-                <a:sym typeface="Times New Roman"/>
-              </a:rPr>
-              <a:t>Julian </a:t>
-            </a:r>
-            <a:r>
               <a:rPr lang="en-US" sz="1600">
                 <a:latin typeface="Times New Roman"/>
                 <a:ea typeface="Times New Roman"/>
                 <a:cs typeface="Times New Roman"/>
                 <a:sym typeface="Times New Roman"/>
               </a:rPr>
-              <a:t>Moreno</a:t>
+              <a:t>Julian Moreno</a:t>
             </a:r>
-            <a:endParaRPr b="0" i="0" sz="1600" u="none" cap="none" strike="noStrike">
-              <a:solidFill>
-                <a:srgbClr val="000000"/>
-              </a:solidFill>
+            <a:endParaRPr sz="1600">
               <a:latin typeface="Times New Roman"/>
               <a:ea typeface="Times New Roman"/>
               <a:cs typeface="Times New Roman"/>
@@ -18299,813 +18134,6 @@
   <p:cSld>
     <p:bg>
       <p:bgPr>
-        <a:solidFill>
-          <a:schemeClr val="lt1"/>
-        </a:solidFill>
-      </p:bgPr>
-    </p:bg>
-    <p:spTree>
-      <p:nvGrpSpPr>
-        <p:cNvPr id="185" name="Shape 185"/>
-        <p:cNvGrpSpPr/>
-        <p:nvPr/>
-      </p:nvGrpSpPr>
-      <p:grpSpPr>
-        <a:xfrm>
-          <a:off x="0" y="0"/>
-          <a:ext cx="0" cy="0"/>
-          <a:chOff x="0" y="0"/>
-          <a:chExt cx="0" cy="0"/>
-        </a:xfrm>
-      </p:grpSpPr>
-      <p:sp>
-        <p:nvSpPr>
-          <p:cNvPr id="186" name="Google Shape;186;p9"/>
-          <p:cNvSpPr/>
-          <p:nvPr/>
-        </p:nvSpPr>
-        <p:spPr>
-          <a:xfrm>
-            <a:off x="0" y="0"/>
-            <a:ext cx="12188952" cy="6858000"/>
-          </a:xfrm>
-          <a:prstGeom prst="rect">
-            <a:avLst/>
-          </a:prstGeom>
-          <a:solidFill>
-            <a:schemeClr val="lt1"/>
-          </a:solidFill>
-          <a:ln>
-            <a:noFill/>
-          </a:ln>
-        </p:spPr>
-        <p:txBody>
-          <a:bodyPr anchorCtr="0" anchor="ctr" bIns="45700" lIns="91425" spcFirstLastPara="1" rIns="91425" wrap="square" tIns="45700">
-            <a:noAutofit/>
-          </a:bodyPr>
-          <a:lstStyle/>
-          <a:p>
-            <a:pPr indent="0" lvl="0" marL="0" marR="0" rtl="0" algn="ctr">
-              <a:lnSpc>
-                <a:spcPct val="100000"/>
-              </a:lnSpc>
-              <a:spcBef>
-                <a:spcPts val="0"/>
-              </a:spcBef>
-              <a:spcAft>
-                <a:spcPts val="0"/>
-              </a:spcAft>
-              <a:buClr>
-                <a:srgbClr val="000000"/>
-              </a:buClr>
-              <a:buSzPts val="1800"/>
-              <a:buFont typeface="Arial"/>
-              <a:buNone/>
-            </a:pPr>
-            <a:r>
-              <a:t/>
-            </a:r>
-            <a:endParaRPr b="0" i="0" sz="1800" u="none" cap="none" strike="noStrike">
-              <a:solidFill>
-                <a:schemeClr val="lt1"/>
-              </a:solidFill>
-              <a:latin typeface="Calibri"/>
-              <a:ea typeface="Calibri"/>
-              <a:cs typeface="Calibri"/>
-              <a:sym typeface="Calibri"/>
-            </a:endParaRPr>
-          </a:p>
-        </p:txBody>
-      </p:sp>
-      <p:sp>
-        <p:nvSpPr>
-          <p:cNvPr id="187" name="Google Shape;187;p9"/>
-          <p:cNvSpPr txBox="1"/>
-          <p:nvPr/>
-        </p:nvSpPr>
-        <p:spPr>
-          <a:xfrm>
-            <a:off x="5297762" y="329184"/>
-            <a:ext cx="6251110" cy="1783080"/>
-          </a:xfrm>
-          <a:prstGeom prst="rect">
-            <a:avLst/>
-          </a:prstGeom>
-          <a:noFill/>
-          <a:ln>
-            <a:noFill/>
-          </a:ln>
-        </p:spPr>
-        <p:txBody>
-          <a:bodyPr anchorCtr="0" anchor="b" bIns="45700" lIns="91425" spcFirstLastPara="1" rIns="91425" wrap="square" tIns="45700">
-            <a:normAutofit/>
-          </a:bodyPr>
-          <a:lstStyle/>
-          <a:p>
-            <a:pPr indent="0" lvl="0" marL="0" marR="0" rtl="0" algn="ctr">
-              <a:lnSpc>
-                <a:spcPct val="90000"/>
-              </a:lnSpc>
-              <a:spcBef>
-                <a:spcPts val="0"/>
-              </a:spcBef>
-              <a:spcAft>
-                <a:spcPts val="0"/>
-              </a:spcAft>
-              <a:buClr>
-                <a:srgbClr val="000000"/>
-              </a:buClr>
-              <a:buSzPts val="5400"/>
-              <a:buFont typeface="Arial"/>
-              <a:buNone/>
-            </a:pPr>
-            <a:r>
-              <a:rPr b="1" i="0" lang="en-US" sz="5400" u="none" cap="none" strike="noStrike">
-                <a:solidFill>
-                  <a:schemeClr val="dk1"/>
-                </a:solidFill>
-                <a:latin typeface="Comic Sans MS"/>
-                <a:ea typeface="Comic Sans MS"/>
-                <a:cs typeface="Comic Sans MS"/>
-                <a:sym typeface="Comic Sans MS"/>
-              </a:rPr>
-              <a:t>Alcance del</a:t>
-            </a:r>
-            <a:endParaRPr b="0" i="0" sz="1400" u="none" cap="none" strike="noStrike">
-              <a:solidFill>
-                <a:srgbClr val="000000"/>
-              </a:solidFill>
-              <a:latin typeface="Arial"/>
-              <a:ea typeface="Arial"/>
-              <a:cs typeface="Arial"/>
-              <a:sym typeface="Arial"/>
-            </a:endParaRPr>
-          </a:p>
-          <a:p>
-            <a:pPr indent="0" lvl="0" marL="0" marR="0" rtl="0" algn="ctr">
-              <a:lnSpc>
-                <a:spcPct val="90000"/>
-              </a:lnSpc>
-              <a:spcBef>
-                <a:spcPts val="600"/>
-              </a:spcBef>
-              <a:spcAft>
-                <a:spcPts val="0"/>
-              </a:spcAft>
-              <a:buClr>
-                <a:srgbClr val="000000"/>
-              </a:buClr>
-              <a:buSzPts val="5400"/>
-              <a:buFont typeface="Arial"/>
-              <a:buNone/>
-            </a:pPr>
-            <a:r>
-              <a:rPr b="1" i="0" lang="en-US" sz="5400" u="none" cap="none" strike="noStrike">
-                <a:solidFill>
-                  <a:schemeClr val="dk1"/>
-                </a:solidFill>
-                <a:latin typeface="Comic Sans MS"/>
-                <a:ea typeface="Comic Sans MS"/>
-                <a:cs typeface="Comic Sans MS"/>
-                <a:sym typeface="Comic Sans MS"/>
-              </a:rPr>
-              <a:t>Proyecto</a:t>
-            </a:r>
-            <a:endParaRPr b="1" i="0" sz="5400" u="none" cap="none" strike="noStrike">
-              <a:solidFill>
-                <a:schemeClr val="dk1"/>
-              </a:solidFill>
-              <a:latin typeface="Comic Sans MS"/>
-              <a:ea typeface="Comic Sans MS"/>
-              <a:cs typeface="Comic Sans MS"/>
-              <a:sym typeface="Comic Sans MS"/>
-            </a:endParaRPr>
-          </a:p>
-        </p:txBody>
-      </p:sp>
-      <p:pic>
-        <p:nvPicPr>
-          <p:cNvPr descr="Diagrama&#10;&#10;El contenido generado por IA puede ser incorrecto." id="188" name="Google Shape;188;p9"/>
-          <p:cNvPicPr preferRelativeResize="0"/>
-          <p:nvPr/>
-        </p:nvPicPr>
-        <p:blipFill rotWithShape="1">
-          <a:blip r:embed="rId3">
-            <a:alphaModFix/>
-          </a:blip>
-          <a:srcRect b="17170" l="0" r="-1" t="0"/>
-          <a:stretch/>
-        </p:blipFill>
-        <p:spPr>
-          <a:xfrm>
-            <a:off x="0" y="-9515"/>
-            <a:ext cx="4657344" cy="6857990"/>
-          </a:xfrm>
-          <a:custGeom>
-            <a:rect b="b" l="l" r="r" t="t"/>
-            <a:pathLst>
-              <a:path extrusionOk="0" h="6858000" w="4657344">
-                <a:moveTo>
-                  <a:pt x="0" y="0"/>
-                </a:moveTo>
-                <a:lnTo>
-                  <a:pt x="3429755" y="0"/>
-                </a:lnTo>
-                <a:lnTo>
-                  <a:pt x="3526016" y="148742"/>
-                </a:lnTo>
-                <a:cubicBezTo>
-                  <a:pt x="3657740" y="365513"/>
-                  <a:pt x="3777402" y="589569"/>
-                  <a:pt x="3886489" y="819975"/>
-                </a:cubicBezTo>
-                <a:cubicBezTo>
-                  <a:pt x="3891856" y="833492"/>
-                  <a:pt x="3900663" y="845393"/>
-                  <a:pt x="3912049" y="854514"/>
-                </a:cubicBezTo>
-                <a:cubicBezTo>
-                  <a:pt x="3897352" y="819849"/>
-                  <a:pt x="3883037" y="784928"/>
-                  <a:pt x="3868083" y="750263"/>
-                </a:cubicBezTo>
-                <a:cubicBezTo>
-                  <a:pt x="3806989" y="608712"/>
-                  <a:pt x="3742478" y="469145"/>
-                  <a:pt x="3674155" y="331786"/>
-                </a:cubicBezTo>
-                <a:lnTo>
-                  <a:pt x="3496656" y="0"/>
-                </a:lnTo>
-                <a:lnTo>
-                  <a:pt x="3554371" y="0"/>
-                </a:lnTo>
-                <a:lnTo>
-                  <a:pt x="3661621" y="196614"/>
-                </a:lnTo>
-                <a:cubicBezTo>
-                  <a:pt x="3856899" y="573253"/>
-                  <a:pt x="4021071" y="966066"/>
-                  <a:pt x="4161279" y="1371196"/>
-                </a:cubicBezTo>
-                <a:cubicBezTo>
-                  <a:pt x="4379525" y="2007265"/>
-                  <a:pt x="4530141" y="2664286"/>
-                  <a:pt x="4610660" y="3331516"/>
-                </a:cubicBezTo>
-                <a:cubicBezTo>
-                  <a:pt x="4652837" y="3672965"/>
-                  <a:pt x="4671625" y="4013908"/>
-                  <a:pt x="4645040" y="4357388"/>
-                </a:cubicBezTo>
-                <a:cubicBezTo>
-                  <a:pt x="4613599" y="4758899"/>
-                  <a:pt x="4566181" y="5157998"/>
-                  <a:pt x="4485789" y="5552906"/>
-                </a:cubicBezTo>
-                <a:cubicBezTo>
-                  <a:pt x="4397121" y="5988893"/>
-                  <a:pt x="4276748" y="6414594"/>
-                  <a:pt x="4117769" y="6828295"/>
-                </a:cubicBezTo>
-                <a:lnTo>
-                  <a:pt x="4105288" y="6858000"/>
-                </a:lnTo>
-                <a:lnTo>
-                  <a:pt x="4052520" y="6858000"/>
-                </a:lnTo>
-                <a:lnTo>
-                  <a:pt x="4059369" y="6841549"/>
-                </a:lnTo>
-                <a:cubicBezTo>
-                  <a:pt x="4147276" y="6614016"/>
-                  <a:pt x="4224193" y="6380817"/>
-                  <a:pt x="4291518" y="6142729"/>
-                </a:cubicBezTo>
-                <a:cubicBezTo>
-                  <a:pt x="4350055" y="5935370"/>
-                  <a:pt x="4393256" y="5723695"/>
-                  <a:pt x="4443357" y="5513923"/>
-                </a:cubicBezTo>
-                <a:cubicBezTo>
-                  <a:pt x="4444541" y="5502788"/>
-                  <a:pt x="4445137" y="5491601"/>
-                  <a:pt x="4445146" y="5480401"/>
-                </a:cubicBezTo>
-                <a:cubicBezTo>
-                  <a:pt x="4408465" y="5607635"/>
-                  <a:pt x="4379196" y="5719759"/>
-                  <a:pt x="4344559" y="5830359"/>
-                </a:cubicBezTo>
-                <a:cubicBezTo>
-                  <a:pt x="4254261" y="6118381"/>
-                  <a:pt x="4150112" y="6398531"/>
-                  <a:pt x="4031702" y="6670527"/>
-                </a:cubicBezTo>
-                <a:lnTo>
-                  <a:pt x="3943824" y="6858000"/>
-                </a:lnTo>
-                <a:lnTo>
-                  <a:pt x="0" y="6858000"/>
-                </a:lnTo>
-                <a:close/>
-              </a:path>
-            </a:pathLst>
-          </a:custGeom>
-          <a:noFill/>
-          <a:ln>
-            <a:noFill/>
-          </a:ln>
-        </p:spPr>
-      </p:pic>
-      <p:sp>
-        <p:nvSpPr>
-          <p:cNvPr id="189" name="Google Shape;189;p9"/>
-          <p:cNvSpPr/>
-          <p:nvPr/>
-        </p:nvSpPr>
-        <p:spPr>
-          <a:xfrm>
-            <a:off x="5297762" y="2374947"/>
-            <a:ext cx="4243589" cy="18288"/>
-          </a:xfrm>
-          <a:custGeom>
-            <a:rect b="b" l="l" r="r" t="t"/>
-            <a:pathLst>
-              <a:path extrusionOk="0" fill="none" h="18288" w="4243589">
-                <a:moveTo>
-                  <a:pt x="0" y="0"/>
-                </a:moveTo>
-                <a:cubicBezTo>
-                  <a:pt x="213395" y="-21006"/>
-                  <a:pt x="307421" y="-18116"/>
-                  <a:pt x="478919" y="0"/>
-                </a:cubicBezTo>
-                <a:cubicBezTo>
-                  <a:pt x="650417" y="18116"/>
-                  <a:pt x="831092" y="-21237"/>
-                  <a:pt x="957839" y="0"/>
-                </a:cubicBezTo>
-                <a:cubicBezTo>
-                  <a:pt x="1084586" y="21237"/>
-                  <a:pt x="1301682" y="25124"/>
-                  <a:pt x="1521630" y="0"/>
-                </a:cubicBezTo>
-                <a:cubicBezTo>
-                  <a:pt x="1741578" y="-25124"/>
-                  <a:pt x="1970269" y="-29139"/>
-                  <a:pt x="2212729" y="0"/>
-                </a:cubicBezTo>
-                <a:cubicBezTo>
-                  <a:pt x="2455189" y="29139"/>
-                  <a:pt x="2558847" y="-4796"/>
-                  <a:pt x="2734084" y="0"/>
-                </a:cubicBezTo>
-                <a:cubicBezTo>
-                  <a:pt x="2909321" y="4796"/>
-                  <a:pt x="3097217" y="-13409"/>
-                  <a:pt x="3255439" y="0"/>
-                </a:cubicBezTo>
-                <a:cubicBezTo>
-                  <a:pt x="3413662" y="13409"/>
-                  <a:pt x="3979999" y="-10121"/>
-                  <a:pt x="4243589" y="0"/>
-                </a:cubicBezTo>
-                <a:cubicBezTo>
-                  <a:pt x="4244484" y="8974"/>
-                  <a:pt x="4243043" y="9359"/>
-                  <a:pt x="4243589" y="18288"/>
-                </a:cubicBezTo>
-                <a:cubicBezTo>
-                  <a:pt x="4058777" y="31246"/>
-                  <a:pt x="3910348" y="3158"/>
-                  <a:pt x="3594926" y="18288"/>
-                </a:cubicBezTo>
-                <a:cubicBezTo>
-                  <a:pt x="3279504" y="33418"/>
-                  <a:pt x="3319955" y="-3977"/>
-                  <a:pt x="3073571" y="18288"/>
-                </a:cubicBezTo>
-                <a:cubicBezTo>
-                  <a:pt x="2827187" y="40553"/>
-                  <a:pt x="2767387" y="1863"/>
-                  <a:pt x="2552216" y="18288"/>
-                </a:cubicBezTo>
-                <a:cubicBezTo>
-                  <a:pt x="2337046" y="34713"/>
-                  <a:pt x="2181871" y="19527"/>
-                  <a:pt x="1903553" y="18288"/>
-                </a:cubicBezTo>
-                <a:cubicBezTo>
-                  <a:pt x="1625235" y="17049"/>
-                  <a:pt x="1557672" y="24174"/>
-                  <a:pt x="1212454" y="18288"/>
-                </a:cubicBezTo>
-                <a:cubicBezTo>
-                  <a:pt x="867236" y="12402"/>
-                  <a:pt x="874382" y="15627"/>
-                  <a:pt x="733535" y="18288"/>
-                </a:cubicBezTo>
-                <a:cubicBezTo>
-                  <a:pt x="592688" y="20949"/>
-                  <a:pt x="183477" y="14753"/>
-                  <a:pt x="0" y="18288"/>
-                </a:cubicBezTo>
-                <a:cubicBezTo>
-                  <a:pt x="-229" y="14222"/>
-                  <a:pt x="509" y="5816"/>
-                  <a:pt x="0" y="0"/>
-                </a:cubicBezTo>
-                <a:close/>
-              </a:path>
-              <a:path extrusionOk="0" h="18288" w="4243589">
-                <a:moveTo>
-                  <a:pt x="0" y="0"/>
-                </a:moveTo>
-                <a:cubicBezTo>
-                  <a:pt x="143690" y="16630"/>
-                  <a:pt x="266667" y="14847"/>
-                  <a:pt x="521355" y="0"/>
-                </a:cubicBezTo>
-                <a:cubicBezTo>
-                  <a:pt x="776043" y="-14847"/>
-                  <a:pt x="814491" y="-17363"/>
-                  <a:pt x="1000275" y="0"/>
-                </a:cubicBezTo>
-                <a:cubicBezTo>
-                  <a:pt x="1186059" y="17363"/>
-                  <a:pt x="1352504" y="-23507"/>
-                  <a:pt x="1521630" y="0"/>
-                </a:cubicBezTo>
-                <a:cubicBezTo>
-                  <a:pt x="1690756" y="23507"/>
-                  <a:pt x="1889525" y="5871"/>
-                  <a:pt x="2127857" y="0"/>
-                </a:cubicBezTo>
-                <a:cubicBezTo>
-                  <a:pt x="2366189" y="-5871"/>
-                  <a:pt x="2620628" y="-27997"/>
-                  <a:pt x="2776520" y="0"/>
-                </a:cubicBezTo>
-                <a:cubicBezTo>
-                  <a:pt x="2932412" y="27997"/>
-                  <a:pt x="3131683" y="-25073"/>
-                  <a:pt x="3467618" y="0"/>
-                </a:cubicBezTo>
-                <a:cubicBezTo>
-                  <a:pt x="3803553" y="25073"/>
-                  <a:pt x="4017371" y="3071"/>
-                  <a:pt x="4243589" y="0"/>
-                </a:cubicBezTo>
-                <a:cubicBezTo>
-                  <a:pt x="4243134" y="6162"/>
-                  <a:pt x="4243492" y="11775"/>
-                  <a:pt x="4243589" y="18288"/>
-                </a:cubicBezTo>
-                <a:cubicBezTo>
-                  <a:pt x="4017834" y="-5779"/>
-                  <a:pt x="3834586" y="13376"/>
-                  <a:pt x="3594926" y="18288"/>
-                </a:cubicBezTo>
-                <a:cubicBezTo>
-                  <a:pt x="3355266" y="23200"/>
-                  <a:pt x="3204179" y="2869"/>
-                  <a:pt x="2903827" y="18288"/>
-                </a:cubicBezTo>
-                <a:cubicBezTo>
-                  <a:pt x="2603475" y="33707"/>
-                  <a:pt x="2526187" y="46187"/>
-                  <a:pt x="2212729" y="18288"/>
-                </a:cubicBezTo>
-                <a:cubicBezTo>
-                  <a:pt x="1899271" y="-9611"/>
-                  <a:pt x="1966289" y="29692"/>
-                  <a:pt x="1733809" y="18288"/>
-                </a:cubicBezTo>
-                <a:cubicBezTo>
-                  <a:pt x="1501329" y="6884"/>
-                  <a:pt x="1343612" y="12492"/>
-                  <a:pt x="1085146" y="18288"/>
-                </a:cubicBezTo>
-                <a:cubicBezTo>
-                  <a:pt x="826680" y="24084"/>
-                  <a:pt x="778184" y="35607"/>
-                  <a:pt x="521355" y="18288"/>
-                </a:cubicBezTo>
-                <a:cubicBezTo>
-                  <a:pt x="264526" y="969"/>
-                  <a:pt x="120277" y="4268"/>
-                  <a:pt x="0" y="18288"/>
-                </a:cubicBezTo>
-                <a:cubicBezTo>
-                  <a:pt x="766" y="10800"/>
-                  <a:pt x="-457" y="8180"/>
-                  <a:pt x="0" y="0"/>
-                </a:cubicBezTo>
-                <a:close/>
-              </a:path>
-            </a:pathLst>
-          </a:custGeom>
-          <a:solidFill>
-            <a:schemeClr val="accent2"/>
-          </a:solidFill>
-          <a:ln cap="rnd" cmpd="sng" w="44450">
-            <a:solidFill>
-              <a:schemeClr val="accent2"/>
-            </a:solidFill>
-            <a:prstDash val="solid"/>
-            <a:round/>
-            <a:headEnd len="sm" w="sm" type="none"/>
-            <a:tailEnd len="sm" w="sm" type="none"/>
-          </a:ln>
-        </p:spPr>
-        <p:txBody>
-          <a:bodyPr anchorCtr="0" anchor="ctr" bIns="45700" lIns="91425" spcFirstLastPara="1" rIns="91425" wrap="square" tIns="45700">
-            <a:noAutofit/>
-          </a:bodyPr>
-          <a:lstStyle/>
-          <a:p>
-            <a:pPr indent="0" lvl="0" marL="0" marR="0" rtl="0" algn="ctr">
-              <a:lnSpc>
-                <a:spcPct val="100000"/>
-              </a:lnSpc>
-              <a:spcBef>
-                <a:spcPts val="0"/>
-              </a:spcBef>
-              <a:spcAft>
-                <a:spcPts val="0"/>
-              </a:spcAft>
-              <a:buClr>
-                <a:srgbClr val="000000"/>
-              </a:buClr>
-              <a:buSzPts val="1800"/>
-              <a:buFont typeface="Arial"/>
-              <a:buNone/>
-            </a:pPr>
-            <a:r>
-              <a:t/>
-            </a:r>
-            <a:endParaRPr b="0" i="0" sz="1800" u="none" cap="none" strike="noStrike">
-              <a:solidFill>
-                <a:schemeClr val="lt1"/>
-              </a:solidFill>
-              <a:latin typeface="Calibri"/>
-              <a:ea typeface="Calibri"/>
-              <a:cs typeface="Calibri"/>
-              <a:sym typeface="Calibri"/>
-            </a:endParaRPr>
-          </a:p>
-        </p:txBody>
-      </p:sp>
-      <p:sp>
-        <p:nvSpPr>
-          <p:cNvPr id="190" name="Google Shape;190;p9"/>
-          <p:cNvSpPr txBox="1"/>
-          <p:nvPr/>
-        </p:nvSpPr>
-        <p:spPr>
-          <a:xfrm>
-            <a:off x="9985925" y="2614560"/>
-            <a:ext cx="1562778" cy="11198543"/>
-          </a:xfrm>
-          <a:prstGeom prst="rect">
-            <a:avLst/>
-          </a:prstGeom>
-          <a:noFill/>
-          <a:ln>
-            <a:noFill/>
-          </a:ln>
-        </p:spPr>
-        <p:txBody>
-          <a:bodyPr anchorCtr="0" anchor="t" bIns="45700" lIns="91425" spcFirstLastPara="1" rIns="91425" wrap="square" tIns="45700">
-            <a:normAutofit/>
-          </a:bodyPr>
-          <a:lstStyle/>
-          <a:p>
-            <a:pPr indent="0" lvl="0" marL="0" marR="0" rtl="0" algn="l">
-              <a:lnSpc>
-                <a:spcPct val="90000"/>
-              </a:lnSpc>
-              <a:spcBef>
-                <a:spcPts val="0"/>
-              </a:spcBef>
-              <a:spcAft>
-                <a:spcPts val="0"/>
-              </a:spcAft>
-              <a:buClr>
-                <a:srgbClr val="000000"/>
-              </a:buClr>
-              <a:buSzPts val="2200"/>
-              <a:buFont typeface="Arial"/>
-              <a:buNone/>
-            </a:pPr>
-            <a:r>
-              <a:t/>
-            </a:r>
-            <a:endParaRPr b="1" i="0" sz="2200" u="none" cap="none" strike="noStrike">
-              <a:solidFill>
-                <a:schemeClr val="dk1"/>
-              </a:solidFill>
-              <a:latin typeface="Times New Roman"/>
-              <a:ea typeface="Times New Roman"/>
-              <a:cs typeface="Times New Roman"/>
-              <a:sym typeface="Times New Roman"/>
-            </a:endParaRPr>
-          </a:p>
-          <a:p>
-            <a:pPr indent="139700" lvl="0" marL="0" marR="0" rtl="0" algn="l">
-              <a:lnSpc>
-                <a:spcPct val="90000"/>
-              </a:lnSpc>
-              <a:spcBef>
-                <a:spcPts val="600"/>
-              </a:spcBef>
-              <a:spcAft>
-                <a:spcPts val="0"/>
-              </a:spcAft>
-              <a:buClr>
-                <a:schemeClr val="dk1"/>
-              </a:buClr>
-              <a:buSzPts val="2200"/>
-              <a:buFont typeface="Arial"/>
-              <a:buNone/>
-            </a:pPr>
-            <a:r>
-              <a:t/>
-            </a:r>
-            <a:endParaRPr b="0" i="0" sz="2200" u="none" cap="none" strike="noStrike">
-              <a:solidFill>
-                <a:schemeClr val="dk1"/>
-              </a:solidFill>
-              <a:latin typeface="Calibri"/>
-              <a:ea typeface="Calibri"/>
-              <a:cs typeface="Calibri"/>
-              <a:sym typeface="Calibri"/>
-            </a:endParaRPr>
-          </a:p>
-          <a:p>
-            <a:pPr indent="0" lvl="0" marL="0" marR="0" rtl="0" algn="l">
-              <a:lnSpc>
-                <a:spcPct val="90000"/>
-              </a:lnSpc>
-              <a:spcBef>
-                <a:spcPts val="600"/>
-              </a:spcBef>
-              <a:spcAft>
-                <a:spcPts val="0"/>
-              </a:spcAft>
-              <a:buClr>
-                <a:srgbClr val="000000"/>
-              </a:buClr>
-              <a:buSzPts val="2200"/>
-              <a:buFont typeface="Arial"/>
-              <a:buNone/>
-            </a:pPr>
-            <a:r>
-              <a:t/>
-            </a:r>
-            <a:endParaRPr b="0" i="0" sz="2200" u="none" cap="none" strike="noStrike">
-              <a:solidFill>
-                <a:schemeClr val="dk1"/>
-              </a:solidFill>
-              <a:latin typeface="Calibri"/>
-              <a:ea typeface="Calibri"/>
-              <a:cs typeface="Calibri"/>
-              <a:sym typeface="Calibri"/>
-            </a:endParaRPr>
-          </a:p>
-        </p:txBody>
-      </p:sp>
-      <p:sp>
-        <p:nvSpPr>
-          <p:cNvPr id="191" name="Google Shape;191;p9"/>
-          <p:cNvSpPr/>
-          <p:nvPr/>
-        </p:nvSpPr>
-        <p:spPr>
-          <a:xfrm>
-            <a:off x="5412862" y="3146963"/>
-            <a:ext cx="6436237" cy="2308324"/>
-          </a:xfrm>
-          <a:prstGeom prst="rect">
-            <a:avLst/>
-          </a:prstGeom>
-          <a:noFill/>
-          <a:ln>
-            <a:noFill/>
-          </a:ln>
-        </p:spPr>
-        <p:txBody>
-          <a:bodyPr anchorCtr="0" anchor="ctr" bIns="45700" lIns="91425" spcFirstLastPara="1" rIns="91425" wrap="square" tIns="45700">
-            <a:spAutoFit/>
-          </a:bodyPr>
-          <a:lstStyle/>
-          <a:p>
-            <a:pPr indent="0" lvl="0" marL="0" marR="0" rtl="0" algn="l">
-              <a:lnSpc>
-                <a:spcPct val="100000"/>
-              </a:lnSpc>
-              <a:spcBef>
-                <a:spcPts val="0"/>
-              </a:spcBef>
-              <a:spcAft>
-                <a:spcPts val="0"/>
-              </a:spcAft>
-              <a:buClr>
-                <a:schemeClr val="dk1"/>
-              </a:buClr>
-              <a:buSzPts val="1800"/>
-              <a:buFont typeface="Arial"/>
-              <a:buNone/>
-            </a:pPr>
-            <a:r>
-              <a:rPr b="0" i="0" lang="en-US" sz="1800" u="none" cap="none" strike="noStrike">
-                <a:solidFill>
-                  <a:schemeClr val="dk1"/>
-                </a:solidFill>
-                <a:latin typeface="Arial"/>
-                <a:ea typeface="Arial"/>
-                <a:cs typeface="Arial"/>
-                <a:sym typeface="Arial"/>
-              </a:rPr>
-              <a:t>Durante siete trimestres se desarrollará un sistema de información diseñado para optimizar la gestión del SPA NEW BOYS, facilitando la comunicación entre el cliente y el establecimiento al momento de agendar los servicios. Además, el sistema permitirá organizar los horarios, registrar los servicios realizados por cada profesional y apoyar el control de</a:t>
-            </a:r>
-            <a:r>
-              <a:rPr lang="en-US" sz="1800">
-                <a:solidFill>
-                  <a:schemeClr val="dk1"/>
-                </a:solidFill>
-              </a:rPr>
-              <a:t> insumos</a:t>
-            </a:r>
-            <a:r>
-              <a:rPr b="0" i="0" lang="en-US" sz="1800" u="none" cap="none" strike="noStrike">
-                <a:solidFill>
-                  <a:schemeClr val="dk1"/>
-                </a:solidFill>
-                <a:latin typeface="Arial"/>
-                <a:ea typeface="Arial"/>
-                <a:cs typeface="Arial"/>
-                <a:sym typeface="Arial"/>
-              </a:rPr>
-              <a:t>.</a:t>
-            </a:r>
-            <a:endParaRPr b="1" i="0" sz="900" u="none" cap="none" strike="noStrike">
-              <a:solidFill>
-                <a:schemeClr val="dk1"/>
-              </a:solidFill>
-              <a:latin typeface="Arial"/>
-              <a:ea typeface="Arial"/>
-              <a:cs typeface="Arial"/>
-              <a:sym typeface="Arial"/>
-            </a:endParaRPr>
-          </a:p>
-          <a:p>
-            <a:pPr indent="0" lvl="0" marL="0" marR="0" rtl="0" algn="l">
-              <a:lnSpc>
-                <a:spcPct val="100000"/>
-              </a:lnSpc>
-              <a:spcBef>
-                <a:spcPts val="0"/>
-              </a:spcBef>
-              <a:spcAft>
-                <a:spcPts val="0"/>
-              </a:spcAft>
-              <a:buClr>
-                <a:schemeClr val="dk1"/>
-              </a:buClr>
-              <a:buSzPts val="1800"/>
-              <a:buFont typeface="Calibri"/>
-              <a:buNone/>
-            </a:pPr>
-            <a:r>
-              <a:t/>
-            </a:r>
-            <a:endParaRPr b="0" i="0" sz="1800" u="none" cap="none" strike="noStrike">
-              <a:solidFill>
-                <a:schemeClr val="dk1"/>
-              </a:solidFill>
-              <a:latin typeface="Arial"/>
-              <a:ea typeface="Arial"/>
-              <a:cs typeface="Arial"/>
-              <a:sym typeface="Arial"/>
-            </a:endParaRPr>
-          </a:p>
-        </p:txBody>
-      </p:sp>
-    </p:spTree>
-  </p:cSld>
-  <p:clrMapOvr>
-    <a:masterClrMapping/>
-  </p:clrMapOvr>
-</p:sld>
-</file>
-
-<file path=ppt/slides/slide11.xml><?xml version="1.0" encoding="utf-8"?>
-<p:sld xmlns:a="http://schemas.openxmlformats.org/drawingml/2006/main" xmlns:r="http://schemas.openxmlformats.org/officeDocument/2006/relationships" xmlns:mc="http://schemas.openxmlformats.org/markup-compatibility/2006" xmlns:mv="urn:schemas-microsoft-com:mac:vml" xmlns:p="http://schemas.openxmlformats.org/presentationml/2006/main" xmlns:c="http://schemas.openxmlformats.org/drawingml/2006/chart" xmlns:dgm="http://schemas.openxmlformats.org/drawingml/2006/diagram" xmlns:o="urn:schemas-microsoft-com:office:office" xmlns:v="urn:schemas-microsoft-com:vml" xmlns:pvml="urn:schemas-microsoft-com:office:powerpoint" xmlns:com="http://schemas.openxmlformats.org/drawingml/2006/compatibility" xmlns:p14="http://schemas.microsoft.com/office/powerpoint/2010/main" xmlns:p15="http://schemas.microsoft.com/office/powerpoint/2012/main" xmlns:ahyp="http://schemas.microsoft.com/office/drawing/2018/hyperlinkcolor">
-  <p:cSld>
-    <p:bg>
-      <p:bgPr>
         <a:blipFill>
           <a:blip r:embed="rId3">
             <a:alphaModFix/>
@@ -19118,7 +18146,7 @@
     </p:bg>
     <p:spTree>
       <p:nvGrpSpPr>
-        <p:cNvPr id="195" name="Shape 195"/>
+        <p:cNvPr id="187" name="Shape 187"/>
         <p:cNvGrpSpPr/>
         <p:nvPr/>
       </p:nvGrpSpPr>
@@ -19132,7 +18160,7 @@
       </p:grpSpPr>
       <p:cxnSp>
         <p:nvCxnSpPr>
-          <p:cNvPr id="196" name="Google Shape;196;p12"/>
+          <p:cNvPr id="188" name="Google Shape;188;p12"/>
           <p:cNvCxnSpPr/>
           <p:nvPr/>
         </p:nvCxnSpPr>
@@ -19158,7 +18186,7 @@
       </p:cxnSp>
       <p:sp>
         <p:nvSpPr>
-          <p:cNvPr id="197" name="Google Shape;197;p12"/>
+          <p:cNvPr id="189" name="Google Shape;189;p12"/>
           <p:cNvSpPr txBox="1"/>
           <p:nvPr/>
         </p:nvSpPr>
@@ -19230,12 +18258,12 @@
 </p:sld>
 </file>
 
-<file path=ppt/slides/slide12.xml><?xml version="1.0" encoding="utf-8"?>
+<file path=ppt/slides/slide11.xml><?xml version="1.0" encoding="utf-8"?>
 <p:sld xmlns:a="http://schemas.openxmlformats.org/drawingml/2006/main" xmlns:r="http://schemas.openxmlformats.org/officeDocument/2006/relationships" xmlns:mc="http://schemas.openxmlformats.org/markup-compatibility/2006" xmlns:mv="urn:schemas-microsoft-com:mac:vml" xmlns:p="http://schemas.openxmlformats.org/presentationml/2006/main" xmlns:c="http://schemas.openxmlformats.org/drawingml/2006/chart" xmlns:dgm="http://schemas.openxmlformats.org/drawingml/2006/diagram" xmlns:o="urn:schemas-microsoft-com:office:office" xmlns:v="urn:schemas-microsoft-com:vml" xmlns:pvml="urn:schemas-microsoft-com:office:powerpoint" xmlns:com="http://schemas.openxmlformats.org/drawingml/2006/compatibility" xmlns:p14="http://schemas.microsoft.com/office/powerpoint/2010/main" xmlns:p15="http://schemas.microsoft.com/office/powerpoint/2012/main" xmlns:ahyp="http://schemas.microsoft.com/office/drawing/2018/hyperlinkcolor">
   <p:cSld>
     <p:spTree>
       <p:nvGrpSpPr>
-        <p:cNvPr id="202" name="Shape 202"/>
+        <p:cNvPr id="194" name="Shape 194"/>
         <p:cNvGrpSpPr/>
         <p:nvPr/>
       </p:nvGrpSpPr>
@@ -19249,22 +18277,21 @@
       </p:grpSpPr>
       <p:pic>
         <p:nvPicPr>
-          <p:cNvPr id="203" name="Google Shape;203;g3b0cc1124e2_0_0"/>
+          <p:cNvPr id="195" name="Google Shape;195;g3b0cc1124e2_0_0"/>
           <p:cNvPicPr preferRelativeResize="0"/>
           <p:nvPr/>
         </p:nvPicPr>
-        <p:blipFill>
+        <p:blipFill rotWithShape="1">
           <a:blip r:embed="rId3">
             <a:alphaModFix/>
           </a:blip>
-          <a:stretch>
-            <a:fillRect/>
-          </a:stretch>
+          <a:srcRect b="0" l="0" r="0" t="0"/>
+          <a:stretch/>
         </p:blipFill>
         <p:spPr>
           <a:xfrm>
-            <a:off x="0" y="414744"/>
-            <a:ext cx="12191999" cy="6028506"/>
+            <a:off x="0" y="813415"/>
+            <a:ext cx="12192000" cy="5231169"/>
           </a:xfrm>
           <a:prstGeom prst="rect">
             <a:avLst/>
@@ -19283,7 +18310,7 @@
 </p:sld>
 </file>
 
-<file path=ppt/slides/slide13.xml><?xml version="1.0" encoding="utf-8"?>
+<file path=ppt/slides/slide12.xml><?xml version="1.0" encoding="utf-8"?>
 <p:sld xmlns:a="http://schemas.openxmlformats.org/drawingml/2006/main" xmlns:r="http://schemas.openxmlformats.org/officeDocument/2006/relationships" xmlns:mc="http://schemas.openxmlformats.org/markup-compatibility/2006" xmlns:mv="urn:schemas-microsoft-com:mac:vml" xmlns:p="http://schemas.openxmlformats.org/presentationml/2006/main" xmlns:c="http://schemas.openxmlformats.org/drawingml/2006/chart" xmlns:dgm="http://schemas.openxmlformats.org/drawingml/2006/diagram" xmlns:o="urn:schemas-microsoft-com:office:office" xmlns:v="urn:schemas-microsoft-com:vml" xmlns:pvml="urn:schemas-microsoft-com:office:powerpoint" xmlns:com="http://schemas.openxmlformats.org/drawingml/2006/compatibility" xmlns:p14="http://schemas.microsoft.com/office/powerpoint/2010/main" xmlns:p15="http://schemas.microsoft.com/office/powerpoint/2012/main" xmlns:ahyp="http://schemas.microsoft.com/office/drawing/2018/hyperlinkcolor">
   <p:cSld>
     <p:bg>
@@ -19300,7 +18327,7 @@
     </p:bg>
     <p:spTree>
       <p:nvGrpSpPr>
-        <p:cNvPr id="207" name="Shape 207"/>
+        <p:cNvPr id="199" name="Shape 199"/>
         <p:cNvGrpSpPr/>
         <p:nvPr/>
       </p:nvGrpSpPr>
@@ -19314,7 +18341,7 @@
       </p:grpSpPr>
       <p:cxnSp>
         <p:nvCxnSpPr>
-          <p:cNvPr id="208" name="Google Shape;208;g391c78eebce_0_4"/>
+          <p:cNvPr id="200" name="Google Shape;200;g391c78eebce_0_4"/>
           <p:cNvCxnSpPr/>
           <p:nvPr/>
         </p:nvCxnSpPr>
@@ -19340,7 +18367,7 @@
       </p:cxnSp>
       <p:sp>
         <p:nvSpPr>
-          <p:cNvPr id="209" name="Google Shape;209;g391c78eebce_0_4"/>
+          <p:cNvPr id="201" name="Google Shape;201;g391c78eebce_0_4"/>
           <p:cNvSpPr txBox="1"/>
           <p:nvPr/>
         </p:nvSpPr>
@@ -19412,7 +18439,7 @@
 </p:sld>
 </file>
 
-<file path=ppt/slides/slide14.xml><?xml version="1.0" encoding="utf-8"?>
+<file path=ppt/slides/slide13.xml><?xml version="1.0" encoding="utf-8"?>
 <p:sld xmlns:a="http://schemas.openxmlformats.org/drawingml/2006/main" xmlns:r="http://schemas.openxmlformats.org/officeDocument/2006/relationships" xmlns:mc="http://schemas.openxmlformats.org/markup-compatibility/2006" xmlns:mv="urn:schemas-microsoft-com:mac:vml" xmlns:p="http://schemas.openxmlformats.org/presentationml/2006/main" xmlns:c="http://schemas.openxmlformats.org/drawingml/2006/chart" xmlns:dgm="http://schemas.openxmlformats.org/drawingml/2006/diagram" xmlns:o="urn:schemas-microsoft-com:office:office" xmlns:v="urn:schemas-microsoft-com:vml" xmlns:pvml="urn:schemas-microsoft-com:office:powerpoint" xmlns:com="http://schemas.openxmlformats.org/drawingml/2006/compatibility" xmlns:p14="http://schemas.microsoft.com/office/powerpoint/2010/main" xmlns:p15="http://schemas.microsoft.com/office/powerpoint/2012/main" xmlns:ahyp="http://schemas.microsoft.com/office/drawing/2018/hyperlinkcolor">
   <p:cSld>
     <p:bg>
@@ -19424,7 +18451,7 @@
     </p:bg>
     <p:spTree>
       <p:nvGrpSpPr>
-        <p:cNvPr id="213" name="Shape 213"/>
+        <p:cNvPr id="205" name="Shape 205"/>
         <p:cNvGrpSpPr/>
         <p:nvPr/>
       </p:nvGrpSpPr>
@@ -19438,7 +18465,7 @@
       </p:grpSpPr>
       <p:sp>
         <p:nvSpPr>
-          <p:cNvPr id="214" name="Google Shape;214;g391c78eebce_0_9"/>
+          <p:cNvPr id="206" name="Google Shape;206;g391c78eebce_0_9"/>
           <p:cNvSpPr/>
           <p:nvPr/>
         </p:nvSpPr>
@@ -19497,7 +18524,7 @@
       </p:sp>
       <p:sp>
         <p:nvSpPr>
-          <p:cNvPr id="215" name="Google Shape;215;g391c78eebce_0_9"/>
+          <p:cNvPr id="207" name="Google Shape;207;g391c78eebce_0_9"/>
           <p:cNvSpPr txBox="1"/>
           <p:nvPr/>
         </p:nvSpPr>
@@ -19563,7 +18590,7 @@
       </p:sp>
       <p:sp>
         <p:nvSpPr>
-          <p:cNvPr id="216" name="Google Shape;216;g391c78eebce_0_9"/>
+          <p:cNvPr id="208" name="Google Shape;208;g391c78eebce_0_9"/>
           <p:cNvSpPr/>
           <p:nvPr/>
         </p:nvSpPr>
@@ -19762,7 +18789,7 @@
       </p:sp>
       <p:sp>
         <p:nvSpPr>
-          <p:cNvPr id="217" name="Google Shape;217;g391c78eebce_0_9"/>
+          <p:cNvPr id="209" name="Google Shape;209;g391c78eebce_0_9"/>
           <p:cNvSpPr txBox="1"/>
           <p:nvPr/>
         </p:nvSpPr>
@@ -19819,7 +18846,7 @@
       </p:sp>
       <p:pic>
         <p:nvPicPr>
-          <p:cNvPr id="218" name="Google Shape;218;g391c78eebce_0_9"/>
+          <p:cNvPr id="210" name="Google Shape;210;g391c78eebce_0_9"/>
           <p:cNvPicPr preferRelativeResize="0"/>
           <p:nvPr/>
         </p:nvPicPr>
@@ -19954,7 +18981,7 @@
       </p:pic>
       <p:sp>
         <p:nvSpPr>
-          <p:cNvPr id="219" name="Google Shape;219;g391c78eebce_0_9"/>
+          <p:cNvPr id="211" name="Google Shape;211;g391c78eebce_0_9"/>
           <p:cNvSpPr/>
           <p:nvPr/>
         </p:nvSpPr>
@@ -20057,7 +19084,7 @@
 </p:sld>
 </file>
 
-<file path=ppt/slides/slide15.xml><?xml version="1.0" encoding="utf-8"?>
+<file path=ppt/slides/slide14.xml><?xml version="1.0" encoding="utf-8"?>
 <p:sld xmlns:a="http://schemas.openxmlformats.org/drawingml/2006/main" xmlns:r="http://schemas.openxmlformats.org/officeDocument/2006/relationships" xmlns:mc="http://schemas.openxmlformats.org/markup-compatibility/2006" xmlns:mv="urn:schemas-microsoft-com:mac:vml" xmlns:p="http://schemas.openxmlformats.org/presentationml/2006/main" xmlns:c="http://schemas.openxmlformats.org/drawingml/2006/chart" xmlns:dgm="http://schemas.openxmlformats.org/drawingml/2006/diagram" xmlns:o="urn:schemas-microsoft-com:office:office" xmlns:v="urn:schemas-microsoft-com:vml" xmlns:pvml="urn:schemas-microsoft-com:office:powerpoint" xmlns:com="http://schemas.openxmlformats.org/drawingml/2006/compatibility" xmlns:p14="http://schemas.microsoft.com/office/powerpoint/2010/main" xmlns:p15="http://schemas.microsoft.com/office/powerpoint/2012/main" xmlns:ahyp="http://schemas.microsoft.com/office/drawing/2018/hyperlinkcolor">
   <p:cSld>
     <p:bg>
@@ -20074,7 +19101,7 @@
     </p:bg>
     <p:spTree>
       <p:nvGrpSpPr>
-        <p:cNvPr id="223" name="Shape 223"/>
+        <p:cNvPr id="215" name="Shape 215"/>
         <p:cNvGrpSpPr/>
         <p:nvPr/>
       </p:nvGrpSpPr>
@@ -20088,7 +19115,7 @@
       </p:grpSpPr>
       <p:cxnSp>
         <p:nvCxnSpPr>
-          <p:cNvPr id="224" name="Google Shape;224;g391c78eebce_0_18"/>
+          <p:cNvPr id="216" name="Google Shape;216;g391c78eebce_0_18"/>
           <p:cNvCxnSpPr/>
           <p:nvPr/>
         </p:nvCxnSpPr>
@@ -20114,7 +19141,7 @@
       </p:cxnSp>
       <p:sp>
         <p:nvSpPr>
-          <p:cNvPr id="225" name="Google Shape;225;g391c78eebce_0_18"/>
+          <p:cNvPr id="217" name="Google Shape;217;g391c78eebce_0_18"/>
           <p:cNvSpPr txBox="1"/>
           <p:nvPr/>
         </p:nvSpPr>
@@ -20217,7 +19244,7 @@
 </p:sld>
 </file>
 
-<file path=ppt/slides/slide16.xml><?xml version="1.0" encoding="utf-8"?>
+<file path=ppt/slides/slide15.xml><?xml version="1.0" encoding="utf-8"?>
 <p:sld xmlns:a="http://schemas.openxmlformats.org/drawingml/2006/main" xmlns:r="http://schemas.openxmlformats.org/officeDocument/2006/relationships" xmlns:mc="http://schemas.openxmlformats.org/markup-compatibility/2006" xmlns:mv="urn:schemas-microsoft-com:mac:vml" xmlns:p="http://schemas.openxmlformats.org/presentationml/2006/main" xmlns:c="http://schemas.openxmlformats.org/drawingml/2006/chart" xmlns:dgm="http://schemas.openxmlformats.org/drawingml/2006/diagram" xmlns:o="urn:schemas-microsoft-com:office:office" xmlns:v="urn:schemas-microsoft-com:vml" xmlns:pvml="urn:schemas-microsoft-com:office:powerpoint" xmlns:com="http://schemas.openxmlformats.org/drawingml/2006/compatibility" xmlns:p14="http://schemas.microsoft.com/office/powerpoint/2010/main" xmlns:p15="http://schemas.microsoft.com/office/powerpoint/2012/main" xmlns:ahyp="http://schemas.microsoft.com/office/drawing/2018/hyperlinkcolor">
   <p:cSld>
     <p:bg>
@@ -20229,7 +19256,7 @@
     </p:bg>
     <p:spTree>
       <p:nvGrpSpPr>
-        <p:cNvPr id="229" name="Shape 229"/>
+        <p:cNvPr id="221" name="Shape 221"/>
         <p:cNvGrpSpPr/>
         <p:nvPr/>
       </p:nvGrpSpPr>
@@ -20243,7 +19270,7 @@
       </p:grpSpPr>
       <p:sp>
         <p:nvSpPr>
-          <p:cNvPr id="230" name="Google Shape;230;p10"/>
+          <p:cNvPr id="222" name="Google Shape;222;p10"/>
           <p:cNvSpPr/>
           <p:nvPr/>
         </p:nvSpPr>
@@ -20302,7 +19329,7 @@
       </p:sp>
       <p:sp>
         <p:nvSpPr>
-          <p:cNvPr id="231" name="Google Shape;231;p10"/>
+          <p:cNvPr id="223" name="Google Shape;223;p10"/>
           <p:cNvSpPr/>
           <p:nvPr/>
         </p:nvSpPr>
@@ -20383,7 +19410,7 @@
       </p:sp>
       <p:sp>
         <p:nvSpPr>
-          <p:cNvPr id="232" name="Google Shape;232;p10"/>
+          <p:cNvPr id="224" name="Google Shape;224;p10"/>
           <p:cNvSpPr/>
           <p:nvPr/>
         </p:nvSpPr>
@@ -20444,7 +19471,7 @@
       </p:sp>
       <p:sp>
         <p:nvSpPr>
-          <p:cNvPr id="233" name="Google Shape;233;p10"/>
+          <p:cNvPr id="225" name="Google Shape;225;p10"/>
           <p:cNvSpPr/>
           <p:nvPr/>
         </p:nvSpPr>
@@ -20505,7 +19532,7 @@
       </p:sp>
       <p:sp>
         <p:nvSpPr>
-          <p:cNvPr id="234" name="Google Shape;234;p10"/>
+          <p:cNvPr id="226" name="Google Shape;226;p10"/>
           <p:cNvSpPr/>
           <p:nvPr/>
         </p:nvSpPr>
@@ -20583,7 +19610,7 @@
       </p:sp>
       <p:sp>
         <p:nvSpPr>
-          <p:cNvPr id="235" name="Google Shape;235;p10"/>
+          <p:cNvPr id="227" name="Google Shape;227;p10"/>
           <p:cNvSpPr/>
           <p:nvPr/>
         </p:nvSpPr>
@@ -20646,7 +19673,7 @@
       </p:sp>
       <p:pic>
         <p:nvPicPr>
-          <p:cNvPr descr="Calendario&#10;&#10;El contenido generado por IA puede ser incorrecto." id="236" name="Google Shape;236;p10"/>
+          <p:cNvPr descr="Calendario&#10;&#10;El contenido generado por IA puede ser incorrecto." id="228" name="Google Shape;228;p10"/>
           <p:cNvPicPr preferRelativeResize="0"/>
           <p:nvPr/>
         </p:nvPicPr>
@@ -20673,7 +19700,7 @@
       </p:pic>
       <p:sp>
         <p:nvSpPr>
-          <p:cNvPr id="237" name="Google Shape;237;p10"/>
+          <p:cNvPr id="229" name="Google Shape;229;p10"/>
           <p:cNvSpPr/>
           <p:nvPr/>
         </p:nvSpPr>
@@ -20742,7 +19769,7 @@
 </p:sld>
 </file>
 
-<file path=ppt/slides/slide17.xml><?xml version="1.0" encoding="utf-8"?>
+<file path=ppt/slides/slide16.xml><?xml version="1.0" encoding="utf-8"?>
 <p:sld xmlns:a="http://schemas.openxmlformats.org/drawingml/2006/main" xmlns:r="http://schemas.openxmlformats.org/officeDocument/2006/relationships" xmlns:mc="http://schemas.openxmlformats.org/markup-compatibility/2006" xmlns:mv="urn:schemas-microsoft-com:mac:vml" xmlns:p="http://schemas.openxmlformats.org/presentationml/2006/main" xmlns:c="http://schemas.openxmlformats.org/drawingml/2006/chart" xmlns:dgm="http://schemas.openxmlformats.org/drawingml/2006/diagram" xmlns:o="urn:schemas-microsoft-com:office:office" xmlns:v="urn:schemas-microsoft-com:vml" xmlns:pvml="urn:schemas-microsoft-com:office:powerpoint" xmlns:com="http://schemas.openxmlformats.org/drawingml/2006/compatibility" xmlns:p14="http://schemas.microsoft.com/office/powerpoint/2010/main" xmlns:p15="http://schemas.microsoft.com/office/powerpoint/2012/main" xmlns:ahyp="http://schemas.microsoft.com/office/drawing/2018/hyperlinkcolor">
   <p:cSld>
     <p:bg>
@@ -20754,7 +19781,7 @@
     </p:bg>
     <p:spTree>
       <p:nvGrpSpPr>
-        <p:cNvPr id="241" name="Shape 241"/>
+        <p:cNvPr id="233" name="Shape 233"/>
         <p:cNvGrpSpPr/>
         <p:nvPr/>
       </p:nvGrpSpPr>
@@ -20768,7 +19795,7 @@
       </p:grpSpPr>
       <p:sp>
         <p:nvSpPr>
-          <p:cNvPr id="242" name="Google Shape;242;p11"/>
+          <p:cNvPr id="234" name="Google Shape;234;p11"/>
           <p:cNvSpPr/>
           <p:nvPr/>
         </p:nvSpPr>
@@ -20827,7 +19854,7 @@
       </p:sp>
       <p:sp>
         <p:nvSpPr>
-          <p:cNvPr id="243" name="Google Shape;243;p11"/>
+          <p:cNvPr id="235" name="Google Shape;235;p11"/>
           <p:cNvSpPr/>
           <p:nvPr/>
         </p:nvSpPr>
@@ -20908,7 +19935,7 @@
       </p:sp>
       <p:sp>
         <p:nvSpPr>
-          <p:cNvPr id="244" name="Google Shape;244;p11"/>
+          <p:cNvPr id="236" name="Google Shape;236;p11"/>
           <p:cNvSpPr/>
           <p:nvPr/>
         </p:nvSpPr>
@@ -20969,7 +19996,7 @@
       </p:sp>
       <p:sp>
         <p:nvSpPr>
-          <p:cNvPr id="245" name="Google Shape;245;p11"/>
+          <p:cNvPr id="237" name="Google Shape;237;p11"/>
           <p:cNvSpPr/>
           <p:nvPr/>
         </p:nvSpPr>
@@ -21030,7 +20057,7 @@
       </p:sp>
       <p:sp>
         <p:nvSpPr>
-          <p:cNvPr id="246" name="Google Shape;246;p11"/>
+          <p:cNvPr id="238" name="Google Shape;238;p11"/>
           <p:cNvSpPr/>
           <p:nvPr/>
         </p:nvSpPr>
@@ -21108,7 +20135,7 @@
       </p:sp>
       <p:sp>
         <p:nvSpPr>
-          <p:cNvPr id="247" name="Google Shape;247;p11"/>
+          <p:cNvPr id="239" name="Google Shape;239;p11"/>
           <p:cNvSpPr/>
           <p:nvPr/>
         </p:nvSpPr>
@@ -21171,7 +20198,7 @@
       </p:sp>
       <p:pic>
         <p:nvPicPr>
-          <p:cNvPr descr="Tabla&#10;&#10;El contenido generado por IA puede ser incorrecto." id="248" name="Google Shape;248;p11"/>
+          <p:cNvPr descr="Tabla&#10;&#10;El contenido generado por IA puede ser incorrecto." id="240" name="Google Shape;240;p11"/>
           <p:cNvPicPr preferRelativeResize="0"/>
           <p:nvPr/>
         </p:nvPicPr>
@@ -21198,7 +20225,7 @@
       </p:pic>
       <p:sp>
         <p:nvSpPr>
-          <p:cNvPr id="249" name="Google Shape;249;p11"/>
+          <p:cNvPr id="241" name="Google Shape;241;p11"/>
           <p:cNvSpPr/>
           <p:nvPr/>
         </p:nvSpPr>
@@ -21267,7 +20294,7 @@
 </p:sld>
 </file>
 
-<file path=ppt/slides/slide18.xml><?xml version="1.0" encoding="utf-8"?>
+<file path=ppt/slides/slide17.xml><?xml version="1.0" encoding="utf-8"?>
 <p:sld xmlns:a="http://schemas.openxmlformats.org/drawingml/2006/main" xmlns:r="http://schemas.openxmlformats.org/officeDocument/2006/relationships" xmlns:mc="http://schemas.openxmlformats.org/markup-compatibility/2006" xmlns:mv="urn:schemas-microsoft-com:mac:vml" xmlns:p="http://schemas.openxmlformats.org/presentationml/2006/main" xmlns:c="http://schemas.openxmlformats.org/drawingml/2006/chart" xmlns:dgm="http://schemas.openxmlformats.org/drawingml/2006/diagram" xmlns:o="urn:schemas-microsoft-com:office:office" xmlns:v="urn:schemas-microsoft-com:vml" xmlns:pvml="urn:schemas-microsoft-com:office:powerpoint" xmlns:com="http://schemas.openxmlformats.org/drawingml/2006/compatibility" xmlns:p14="http://schemas.microsoft.com/office/powerpoint/2010/main" xmlns:p15="http://schemas.microsoft.com/office/powerpoint/2012/main" xmlns:ahyp="http://schemas.microsoft.com/office/drawing/2018/hyperlinkcolor">
   <p:cSld>
     <p:bg>
@@ -21284,7 +20311,7 @@
     </p:bg>
     <p:spTree>
       <p:nvGrpSpPr>
-        <p:cNvPr id="253" name="Shape 253"/>
+        <p:cNvPr id="245" name="Shape 245"/>
         <p:cNvGrpSpPr/>
         <p:nvPr/>
       </p:nvGrpSpPr>
@@ -21454,7 +20481,7 @@
             <a:tbl>
               <a:tblPr bandRow="1" firstRow="1">
                 <a:noFill/>
-                <a:tableStyleId>{AD7D8961-13EA-4BB3-BE33-A12315E0E241}</a:tableStyleId>
+                <a:tableStyleId>{1993F21D-3952-4D56-9D93-AF171A187089}</a:tableStyleId>
               </a:tblPr>
               <a:tblGrid>
                 <a:gridCol w="5109025"/>
@@ -22773,31 +21800,7 @@
                 <a:cs typeface="Comic Sans MS"/>
                 <a:sym typeface="Comic Sans MS"/>
               </a:rPr>
-              <a:t>Además, el administrador no tiene claridad sobre qué servicios realiza cada profesional ni sobre el uso de los materiales, lo que dificulta el control de</a:t>
-            </a:r>
-            <a:r>
-              <a:rPr lang="en-US" sz="3200">
-                <a:solidFill>
-                  <a:schemeClr val="dk1"/>
-                </a:solidFill>
-                <a:latin typeface="Comic Sans MS"/>
-                <a:ea typeface="Comic Sans MS"/>
-                <a:cs typeface="Comic Sans MS"/>
-                <a:sym typeface="Comic Sans MS"/>
-              </a:rPr>
-              <a:t> insumos</a:t>
-            </a:r>
-            <a:r>
-              <a:rPr b="0" i="0" lang="en-US" sz="3200" u="none" cap="none" strike="noStrike">
-                <a:solidFill>
-                  <a:schemeClr val="dk1"/>
-                </a:solidFill>
-                <a:latin typeface="Comic Sans MS"/>
-                <a:ea typeface="Comic Sans MS"/>
-                <a:cs typeface="Comic Sans MS"/>
-                <a:sym typeface="Comic Sans MS"/>
-              </a:rPr>
-              <a:t>.</a:t>
+              <a:t>Además, el administrador no tiene claridad sobre qué servicios realiza cada profesional ni sobre el uso de los materiales, lo que dificulta el control del inventario.</a:t>
             </a:r>
             <a:br>
               <a:rPr b="0" i="0" lang="en-US" sz="2200" u="none" cap="none" strike="noStrike">
@@ -23230,31 +22233,7 @@
                 <a:cs typeface="Calibri"/>
                 <a:sym typeface="Calibri"/>
               </a:rPr>
-              <a:t>¿Cómo el desarrollo de una aplicación de gestión puede optimizar el agendamiento de citas, el control de los servicios realizados por cada profesional y la administración de</a:t>
-            </a:r>
-            <a:r>
-              <a:rPr lang="en-US" sz="2400">
-                <a:solidFill>
-                  <a:schemeClr val="dk1"/>
-                </a:solidFill>
-                <a:latin typeface="Calibri"/>
-                <a:ea typeface="Calibri"/>
-                <a:cs typeface="Calibri"/>
-                <a:sym typeface="Calibri"/>
-              </a:rPr>
-              <a:t> insumos </a:t>
-            </a:r>
-            <a:r>
-              <a:rPr b="0" i="0" lang="en-US" sz="2400" u="none" cap="none" strike="noStrike">
-                <a:solidFill>
-                  <a:schemeClr val="dk1"/>
-                </a:solidFill>
-                <a:latin typeface="Calibri"/>
-                <a:ea typeface="Calibri"/>
-                <a:cs typeface="Calibri"/>
-                <a:sym typeface="Calibri"/>
-              </a:rPr>
-              <a:t>en el SPA NEW BOYS?</a:t>
+              <a:t>¿Cómo el desarrollo de una aplicación de gestión puede optimizar el agendamiento de citas, el control de los servicios realizados por cada profesional y la administración del inventario en el SPA NEW BOYS?</a:t>
             </a:r>
             <a:endParaRPr b="0" i="0" sz="2200" u="none" cap="none" strike="noStrike">
               <a:solidFill>
@@ -24003,27 +22982,7 @@
                 <a:cs typeface="Arial"/>
                 <a:sym typeface="Arial"/>
               </a:rPr>
-              <a:t>Tras analizar las problemáticas que presenta el SPA NEW BOYS, relacionadas con la inadecuada gestión de citas, la desorganización de los servicios y la falta de control de</a:t>
-            </a:r>
-            <a:r>
-              <a:rPr lang="en-US" sz="1800">
-                <a:solidFill>
-                  <a:schemeClr val="dk1"/>
-                </a:solidFill>
-              </a:rPr>
-              <a:t> insumos</a:t>
-            </a:r>
-            <a:r>
-              <a:rPr b="0" i="0" lang="en-US" sz="1800" u="none" cap="none" strike="noStrike">
-                <a:solidFill>
-                  <a:schemeClr val="dk1"/>
-                </a:solidFill>
-                <a:latin typeface="Arial"/>
-                <a:ea typeface="Arial"/>
-                <a:cs typeface="Arial"/>
-                <a:sym typeface="Arial"/>
-              </a:rPr>
-              <a:t>, se propone el desarrollo de un sistema de información que permita optimizar estos procesos. Este sistema facilitará el agendamiento ordenado de citas para los clientes y brindará al administrador un mayor control sobre los servicios realizados por cada profesional, así como sobre los materiales utilizados en la operación del negocio.</a:t>
+              <a:t>Tras analizar las problemáticas que presenta el SPA NEW BOYS, relacionadas con la inadecuada gestión de citas, la desorganización de los servicios y la falta de control del inventario, se propone el desarrollo de un sistema de información que permita optimizar estos procesos. Este sistema facilitará el agendamiento ordenado de citas para los clientes y brindará al administrador un mayor control sobre los servicios realizados por cada profesional, así como sobre los materiales utilizados en la operación del negocio.</a:t>
             </a:r>
             <a:endParaRPr b="0" i="0" sz="1400" u="none" cap="none" strike="noStrike">
               <a:solidFill>
@@ -24651,31 +23610,7 @@
                 <a:cs typeface="Calibri"/>
                 <a:sym typeface="Calibri"/>
               </a:rPr>
-              <a:t>Crear un sistema de información que permita gestionar de manera sencilla y organizada el control de los clientes, los horarios, los servicios y </a:t>
-            </a:r>
-            <a:r>
-              <a:rPr lang="en-US" sz="2400">
-                <a:solidFill>
-                  <a:schemeClr val="dk1"/>
-                </a:solidFill>
-                <a:latin typeface="Calibri"/>
-                <a:ea typeface="Calibri"/>
-                <a:cs typeface="Calibri"/>
-                <a:sym typeface="Calibri"/>
-              </a:rPr>
-              <a:t>de los insumos </a:t>
-            </a:r>
-            <a:r>
-              <a:rPr b="0" i="0" lang="en-US" sz="2400" u="none" cap="none" strike="noStrike">
-                <a:solidFill>
-                  <a:schemeClr val="dk1"/>
-                </a:solidFill>
-                <a:latin typeface="Calibri"/>
-                <a:ea typeface="Calibri"/>
-                <a:cs typeface="Calibri"/>
-                <a:sym typeface="Calibri"/>
-              </a:rPr>
-              <a:t>del SPA NEW BOYS.</a:t>
+              <a:t>Crear un sistema de información que permita gestionar de manera sencilla y organizada el control de los clientes, los horarios, los servicios y el inventario del SPA NEW BOYS.</a:t>
             </a:r>
             <a:endParaRPr b="0" i="0" sz="2200" u="none" cap="none" strike="noStrike">
               <a:solidFill>
@@ -25035,7 +23970,7 @@
                 <a:buNone/>
               </a:pPr>
               <a:r>
-                <a:rPr b="0" i="0" lang="en-US" sz="1200" u="none" cap="none" strike="noStrike">
+                <a:rPr lang="en-US" sz="1200">
                   <a:solidFill>
                     <a:schemeClr val="dk1"/>
                   </a:solidFill>
@@ -25044,7 +23979,7 @@
                   <a:cs typeface="Times New Roman"/>
                   <a:sym typeface="Times New Roman"/>
                 </a:rPr>
-                <a:t>Registrar y </a:t>
+                <a:t>Registrar y organizar los usuarios del spa, con su respectiva </a:t>
               </a:r>
               <a:r>
                 <a:rPr lang="en-US" sz="1200">
@@ -25056,10 +23991,10 @@
                   <a:cs typeface="Times New Roman"/>
                   <a:sym typeface="Times New Roman"/>
                 </a:rPr>
-                <a:t>gestionar </a:t>
+                <a:t>asignación</a:t>
               </a:r>
               <a:r>
-                <a:rPr b="0" i="0" lang="en-US" sz="1200" u="none" cap="none" strike="noStrike">
+                <a:rPr lang="en-US" sz="1200">
                   <a:solidFill>
                     <a:schemeClr val="dk1"/>
                   </a:solidFill>
@@ -25068,7 +24003,7 @@
                   <a:cs typeface="Times New Roman"/>
                   <a:sym typeface="Times New Roman"/>
                 </a:rPr>
-                <a:t>los usuarios del spa, con su respectiva asignación de roles</a:t>
+                <a:t> de roles</a:t>
               </a:r>
               <a:endParaRPr b="0" i="0" sz="1200" u="none" cap="none" strike="noStrike">
                 <a:solidFill>
@@ -25311,7 +24246,7 @@
                 <a:buNone/>
               </a:pPr>
               <a:r>
-                <a:rPr b="0" i="0" lang="en-US" sz="1200" u="none" cap="none" strike="noStrike">
+                <a:rPr lang="en-US" sz="1200">
                   <a:solidFill>
                     <a:schemeClr val="dk1"/>
                   </a:solidFill>
@@ -25320,7 +24255,31 @@
                   <a:cs typeface="Times New Roman"/>
                   <a:sym typeface="Times New Roman"/>
                 </a:rPr>
-                <a:t>permitir al administrador la gestión de sus empleados y los horarios de estos</a:t>
+                <a:t>p</a:t>
+              </a:r>
+              <a:r>
+                <a:rPr lang="en-US" sz="1200">
+                  <a:solidFill>
+                    <a:schemeClr val="dk1"/>
+                  </a:solidFill>
+                  <a:latin typeface="Times New Roman"/>
+                  <a:ea typeface="Times New Roman"/>
+                  <a:cs typeface="Times New Roman"/>
+                  <a:sym typeface="Times New Roman"/>
+                </a:rPr>
+                <a:t>ermitir al administrador la gestión</a:t>
+              </a:r>
+              <a:r>
+                <a:rPr lang="en-US" sz="1200">
+                  <a:solidFill>
+                    <a:schemeClr val="dk1"/>
+                  </a:solidFill>
+                  <a:latin typeface="Times New Roman"/>
+                  <a:ea typeface="Times New Roman"/>
+                  <a:cs typeface="Times New Roman"/>
+                  <a:sym typeface="Times New Roman"/>
+                </a:rPr>
+                <a:t> de sus empleados y los horarios de estos</a:t>
               </a:r>
               <a:endParaRPr b="0" i="0" sz="1200" u="none" cap="none" strike="noStrike">
                 <a:solidFill>
@@ -25563,7 +24522,7 @@
                 <a:buNone/>
               </a:pPr>
               <a:r>
-                <a:rPr b="0" i="0" lang="en-US" sz="1200" u="none" cap="none" strike="noStrike">
+                <a:rPr lang="en-US" sz="1200">
                   <a:solidFill>
                     <a:schemeClr val="dk1"/>
                   </a:solidFill>
@@ -25780,8 +24739,8 @@
           </p:nvSpPr>
           <p:spPr>
             <a:xfrm>
-              <a:off x="3964643" y="1866715"/>
-              <a:ext cx="1719130" cy="729328"/>
+              <a:off x="3923193" y="1866715"/>
+              <a:ext cx="1719000" cy="729300"/>
             </a:xfrm>
             <a:prstGeom prst="rect">
               <a:avLst/>
@@ -25815,7 +24774,7 @@
                 <a:buNone/>
               </a:pPr>
               <a:r>
-                <a:rPr b="0" i="0" lang="en-US" sz="1200" u="none" cap="none" strike="noStrike">
+                <a:rPr lang="en-US" sz="1200">
                   <a:solidFill>
                     <a:schemeClr val="dk1"/>
                   </a:solidFill>
@@ -25824,7 +24783,55 @@
                   <a:cs typeface="Times New Roman"/>
                   <a:sym typeface="Times New Roman"/>
                 </a:rPr>
-                <a:t>Permitir una gestión más ordenada de los insumos utilizados en los servicios</a:t>
+                <a:t>Permitir una </a:t>
+              </a:r>
+              <a:r>
+                <a:rPr lang="en-US" sz="1200">
+                  <a:solidFill>
+                    <a:schemeClr val="dk1"/>
+                  </a:solidFill>
+                  <a:latin typeface="Times New Roman"/>
+                  <a:ea typeface="Times New Roman"/>
+                  <a:cs typeface="Times New Roman"/>
+                  <a:sym typeface="Times New Roman"/>
+                </a:rPr>
+                <a:t>gestión</a:t>
+              </a:r>
+              <a:r>
+                <a:rPr lang="en-US" sz="1200">
+                  <a:solidFill>
+                    <a:schemeClr val="dk1"/>
+                  </a:solidFill>
+                  <a:latin typeface="Times New Roman"/>
+                  <a:ea typeface="Times New Roman"/>
+                  <a:cs typeface="Times New Roman"/>
+                  <a:sym typeface="Times New Roman"/>
+                </a:rPr>
+                <a:t> </a:t>
+              </a:r>
+              <a:r>
+                <a:rPr lang="en-US" sz="1200">
+                  <a:solidFill>
+                    <a:schemeClr val="dk1"/>
+                  </a:solidFill>
+                  <a:latin typeface="Times New Roman"/>
+                  <a:ea typeface="Times New Roman"/>
+                  <a:cs typeface="Times New Roman"/>
+                  <a:sym typeface="Times New Roman"/>
+                </a:rPr>
+                <a:t>más</a:t>
+              </a:r>
+              <a:r>
+                <a:rPr lang="en-US" sz="1200">
+                  <a:solidFill>
+                    <a:schemeClr val="dk1"/>
+                  </a:solidFill>
+                  <a:latin typeface="Times New Roman"/>
+                  <a:ea typeface="Times New Roman"/>
+                  <a:cs typeface="Times New Roman"/>
+                  <a:sym typeface="Times New Roman"/>
+                </a:rPr>
+                <a:t> ordenada de los insumos utilizados en los servicios</a:t>
               </a:r>
               <a:endParaRPr b="0" i="0" sz="1200" u="none" cap="none" strike="noStrike">
                 <a:solidFill>
@@ -26067,7 +25074,7 @@
                 <a:buNone/>
               </a:pPr>
               <a:r>
-                <a:rPr b="0" i="0" lang="en-US" sz="1200" u="none" cap="none" strike="noStrike">
+                <a:rPr lang="en-US" sz="1200">
                   <a:solidFill>
                     <a:schemeClr val="dk1"/>
                   </a:solidFill>
@@ -26076,7 +25083,31 @@
                   <a:cs typeface="Times New Roman"/>
                   <a:sym typeface="Times New Roman"/>
                 </a:rPr>
-                <a:t>Generar de manera automática y verificada recibos para los servicios prestados por el spa</a:t>
+                <a:t>Generar de manera </a:t>
+              </a:r>
+              <a:r>
+                <a:rPr lang="en-US" sz="1200">
+                  <a:solidFill>
+                    <a:schemeClr val="dk1"/>
+                  </a:solidFill>
+                  <a:latin typeface="Times New Roman"/>
+                  <a:ea typeface="Times New Roman"/>
+                  <a:cs typeface="Times New Roman"/>
+                  <a:sym typeface="Times New Roman"/>
+                </a:rPr>
+                <a:t>automática</a:t>
+              </a:r>
+              <a:r>
+                <a:rPr lang="en-US" sz="1200">
+                  <a:solidFill>
+                    <a:schemeClr val="dk1"/>
+                  </a:solidFill>
+                  <a:latin typeface="Times New Roman"/>
+                  <a:ea typeface="Times New Roman"/>
+                  <a:cs typeface="Times New Roman"/>
+                  <a:sym typeface="Times New Roman"/>
+                </a:rPr>
+                <a:t> y verificada recibos para los servicios prestados por el spa</a:t>
               </a:r>
               <a:endParaRPr b="0" i="0" sz="1200" u="none" cap="none" strike="noStrike">
                 <a:solidFill>
@@ -26129,9 +25160,16 @@
 <file path=ppt/slides/slide9.xml><?xml version="1.0" encoding="utf-8"?>
 <p:sld xmlns:a="http://schemas.openxmlformats.org/drawingml/2006/main" xmlns:r="http://schemas.openxmlformats.org/officeDocument/2006/relationships" xmlns:mc="http://schemas.openxmlformats.org/markup-compatibility/2006" xmlns:mv="urn:schemas-microsoft-com:mac:vml" xmlns:p="http://schemas.openxmlformats.org/presentationml/2006/main" xmlns:c="http://schemas.openxmlformats.org/drawingml/2006/chart" xmlns:dgm="http://schemas.openxmlformats.org/drawingml/2006/diagram" xmlns:o="urn:schemas-microsoft-com:office:office" xmlns:v="urn:schemas-microsoft-com:vml" xmlns:pvml="urn:schemas-microsoft-com:office:powerpoint" xmlns:com="http://schemas.openxmlformats.org/drawingml/2006/compatibility" xmlns:p14="http://schemas.microsoft.com/office/powerpoint/2010/main" xmlns:p15="http://schemas.microsoft.com/office/powerpoint/2012/main" xmlns:ahyp="http://schemas.microsoft.com/office/drawing/2018/hyperlinkcolor">
   <p:cSld>
+    <p:bg>
+      <p:bgPr>
+        <a:solidFill>
+          <a:schemeClr val="lt1"/>
+        </a:solidFill>
+      </p:bgPr>
+    </p:bg>
     <p:spTree>
       <p:nvGrpSpPr>
-        <p:cNvPr id="178" name="Shape 178"/>
+        <p:cNvPr id="177" name="Shape 177"/>
         <p:cNvGrpSpPr/>
         <p:nvPr/>
       </p:nvGrpSpPr>
@@ -26143,893 +25181,75 @@
           <a:chExt cx="0" cy="0"/>
         </a:xfrm>
       </p:grpSpPr>
-      <p:graphicFrame>
-        <p:nvGraphicFramePr>
-          <p:cNvPr id="179" name="Google Shape;179;g395b38490da_0_0"/>
-          <p:cNvGraphicFramePr/>
-          <p:nvPr/>
-        </p:nvGraphicFramePr>
-        <p:xfrm>
-          <a:off x="952500" y="2401550"/>
-          <a:ext cx="3000000" cy="3000000"/>
-        </p:xfrm>
-        <a:graphic>
-          <a:graphicData uri="http://schemas.openxmlformats.org/drawingml/2006/table">
-            <a:tbl>
-              <a:tblPr>
-                <a:noFill/>
-                <a:tableStyleId>{004FCE26-D7BF-4204-9D85-558F506F53B8}</a:tableStyleId>
-              </a:tblPr>
-              <a:tblGrid>
-                <a:gridCol w="2520950"/>
-                <a:gridCol w="7766050"/>
-              </a:tblGrid>
-              <a:tr h="381000">
-                <a:tc>
-                  <a:txBody>
-                    <a:bodyPr/>
-                    <a:lstStyle/>
-                    <a:p>
-                      <a:pPr indent="0" lvl="0" marL="0" rtl="0" algn="ctr">
-                        <a:spcBef>
-                          <a:spcPts val="0"/>
-                        </a:spcBef>
-                        <a:spcAft>
-                          <a:spcPts val="0"/>
-                        </a:spcAft>
-                        <a:buNone/>
-                      </a:pPr>
-                      <a:r>
-                        <a:rPr b="1" lang="en-US" sz="1600"/>
-                        <a:t>Modulos</a:t>
-                      </a:r>
-                      <a:endParaRPr b="1" sz="1600"/>
-                    </a:p>
-                  </a:txBody>
-                  <a:tcPr marT="91425" marB="91425" marR="91425" marL="91425">
-                    <a:lnL cap="flat" cmpd="sng" w="9525">
-                      <a:solidFill>
-                        <a:schemeClr val="dk1"/>
-                      </a:solidFill>
-                      <a:prstDash val="solid"/>
-                      <a:round/>
-                      <a:headEnd len="sm" w="sm" type="none"/>
-                      <a:tailEnd len="sm" w="sm" type="none"/>
-                    </a:lnL>
-                    <a:lnR cap="flat" cmpd="sng" w="9525">
-                      <a:solidFill>
-                        <a:schemeClr val="dk1"/>
-                      </a:solidFill>
-                      <a:prstDash val="solid"/>
-                      <a:round/>
-                      <a:headEnd len="sm" w="sm" type="none"/>
-                      <a:tailEnd len="sm" w="sm" type="none"/>
-                    </a:lnR>
-                    <a:lnT cap="flat" cmpd="sng" w="9525">
-                      <a:solidFill>
-                        <a:schemeClr val="dk1"/>
-                      </a:solidFill>
-                      <a:prstDash val="solid"/>
-                      <a:round/>
-                      <a:headEnd len="sm" w="sm" type="none"/>
-                      <a:tailEnd len="sm" w="sm" type="none"/>
-                    </a:lnT>
-                    <a:lnB cap="flat" cmpd="sng" w="9525">
-                      <a:solidFill>
-                        <a:schemeClr val="dk1"/>
-                      </a:solidFill>
-                      <a:prstDash val="solid"/>
-                      <a:round/>
-                      <a:headEnd len="sm" w="sm" type="none"/>
-                      <a:tailEnd len="sm" w="sm" type="none"/>
-                    </a:lnB>
-                    <a:solidFill>
-                      <a:srgbClr val="B6D7A8"/>
-                    </a:solidFill>
-                  </a:tcPr>
-                </a:tc>
-                <a:tc>
-                  <a:txBody>
-                    <a:bodyPr/>
-                    <a:lstStyle/>
-                    <a:p>
-                      <a:pPr indent="0" lvl="0" marL="0" rtl="0" algn="ctr">
-                        <a:spcBef>
-                          <a:spcPts val="0"/>
-                        </a:spcBef>
-                        <a:spcAft>
-                          <a:spcPts val="0"/>
-                        </a:spcAft>
-                        <a:buNone/>
-                      </a:pPr>
-                      <a:r>
-                        <a:rPr b="1" lang="en-US" sz="1600"/>
-                        <a:t> </a:t>
-                      </a:r>
-                      <a:r>
-                        <a:rPr b="1" lang="en-US" sz="1600"/>
-                        <a:t>Descripción</a:t>
-                      </a:r>
-                      <a:r>
-                        <a:rPr b="1" lang="en-US" sz="1600"/>
-                        <a:t> general </a:t>
-                      </a:r>
-                      <a:endParaRPr b="1" sz="1600"/>
-                    </a:p>
-                  </a:txBody>
-                  <a:tcPr marT="91425" marB="91425" marR="91425" marL="91425">
-                    <a:lnL cap="flat" cmpd="sng" w="9525">
-                      <a:solidFill>
-                        <a:schemeClr val="dk1"/>
-                      </a:solidFill>
-                      <a:prstDash val="solid"/>
-                      <a:round/>
-                      <a:headEnd len="sm" w="sm" type="none"/>
-                      <a:tailEnd len="sm" w="sm" type="none"/>
-                    </a:lnL>
-                    <a:lnR cap="flat" cmpd="sng" w="9525">
-                      <a:solidFill>
-                        <a:schemeClr val="dk1"/>
-                      </a:solidFill>
-                      <a:prstDash val="solid"/>
-                      <a:round/>
-                      <a:headEnd len="sm" w="sm" type="none"/>
-                      <a:tailEnd len="sm" w="sm" type="none"/>
-                    </a:lnR>
-                    <a:lnT cap="flat" cmpd="sng" w="9525">
-                      <a:solidFill>
-                        <a:schemeClr val="dk1"/>
-                      </a:solidFill>
-                      <a:prstDash val="solid"/>
-                      <a:round/>
-                      <a:headEnd len="sm" w="sm" type="none"/>
-                      <a:tailEnd len="sm" w="sm" type="none"/>
-                    </a:lnT>
-                    <a:lnB cap="flat" cmpd="sng" w="9525">
-                      <a:solidFill>
-                        <a:schemeClr val="dk1"/>
-                      </a:solidFill>
-                      <a:prstDash val="solid"/>
-                      <a:round/>
-                      <a:headEnd len="sm" w="sm" type="none"/>
-                      <a:tailEnd len="sm" w="sm" type="none"/>
-                    </a:lnB>
-                    <a:solidFill>
-                      <a:srgbClr val="B6D7A8"/>
-                    </a:solidFill>
-                  </a:tcPr>
-                </a:tc>
-              </a:tr>
-              <a:tr h="381000">
-                <a:tc>
-                  <a:txBody>
-                    <a:bodyPr/>
-                    <a:lstStyle/>
-                    <a:p>
-                      <a:pPr indent="0" lvl="0" marL="0" rtl="0" algn="l">
-                        <a:spcBef>
-                          <a:spcPts val="0"/>
-                        </a:spcBef>
-                        <a:spcAft>
-                          <a:spcPts val="0"/>
-                        </a:spcAft>
-                        <a:buNone/>
-                      </a:pPr>
-                      <a:r>
-                        <a:rPr lang="en-US"/>
-                        <a:t>Gestión</a:t>
-                      </a:r>
-                      <a:r>
-                        <a:rPr lang="en-US"/>
-                        <a:t> </a:t>
-                      </a:r>
-                      <a:r>
-                        <a:rPr lang="en-US"/>
-                        <a:t>de Usuarios</a:t>
-                      </a:r>
-                      <a:endParaRPr/>
-                    </a:p>
-                  </a:txBody>
-                  <a:tcPr marT="91425" marB="91425" marR="91425" marL="91425">
-                    <a:lnL cap="flat" cmpd="sng" w="9525">
-                      <a:solidFill>
-                        <a:schemeClr val="dk1"/>
-                      </a:solidFill>
-                      <a:prstDash val="solid"/>
-                      <a:round/>
-                      <a:headEnd len="sm" w="sm" type="none"/>
-                      <a:tailEnd len="sm" w="sm" type="none"/>
-                    </a:lnL>
-                    <a:lnR cap="flat" cmpd="sng" w="9525">
-                      <a:solidFill>
-                        <a:schemeClr val="dk1"/>
-                      </a:solidFill>
-                      <a:prstDash val="solid"/>
-                      <a:round/>
-                      <a:headEnd len="sm" w="sm" type="none"/>
-                      <a:tailEnd len="sm" w="sm" type="none"/>
-                    </a:lnR>
-                    <a:lnT cap="flat" cmpd="sng" w="9525">
-                      <a:solidFill>
-                        <a:schemeClr val="dk1"/>
-                      </a:solidFill>
-                      <a:prstDash val="solid"/>
-                      <a:round/>
-                      <a:headEnd len="sm" w="sm" type="none"/>
-                      <a:tailEnd len="sm" w="sm" type="none"/>
-                    </a:lnT>
-                    <a:lnB cap="flat" cmpd="sng" w="9525">
-                      <a:solidFill>
-                        <a:schemeClr val="dk1"/>
-                      </a:solidFill>
-                      <a:prstDash val="solid"/>
-                      <a:round/>
-                      <a:headEnd len="sm" w="sm" type="none"/>
-                      <a:tailEnd len="sm" w="sm" type="none"/>
-                    </a:lnB>
-                    <a:solidFill>
-                      <a:srgbClr val="B6D7A8"/>
-                    </a:solidFill>
-                  </a:tcPr>
-                </a:tc>
-                <a:tc>
-                  <a:txBody>
-                    <a:bodyPr/>
-                    <a:lstStyle/>
-                    <a:p>
-                      <a:pPr indent="0" lvl="0" marL="0" rtl="0" algn="l">
-                        <a:spcBef>
-                          <a:spcPts val="0"/>
-                        </a:spcBef>
-                        <a:spcAft>
-                          <a:spcPts val="0"/>
-                        </a:spcAft>
-                        <a:buNone/>
-                      </a:pPr>
-                      <a:r>
-                        <a:rPr lang="en-US"/>
-                        <a:t>Permitir el registro de </a:t>
-                      </a:r>
-                      <a:r>
-                        <a:rPr lang="en-US"/>
-                        <a:t>usuarios</a:t>
-                      </a:r>
-                      <a:r>
-                        <a:rPr lang="en-US"/>
-                        <a:t> por medio de un formulario y la </a:t>
-                      </a:r>
-                      <a:r>
-                        <a:rPr lang="en-US"/>
-                        <a:t>verificación de información registrada en el sistema</a:t>
-                      </a:r>
-                      <a:endParaRPr/>
-                    </a:p>
-                  </a:txBody>
-                  <a:tcPr marT="91425" marB="91425" marR="91425" marL="91425">
-                    <a:lnL cap="flat" cmpd="sng" w="9525">
-                      <a:solidFill>
-                        <a:schemeClr val="dk1"/>
-                      </a:solidFill>
-                      <a:prstDash val="solid"/>
-                      <a:round/>
-                      <a:headEnd len="sm" w="sm" type="none"/>
-                      <a:tailEnd len="sm" w="sm" type="none"/>
-                    </a:lnL>
-                    <a:lnR cap="flat" cmpd="sng" w="9525">
-                      <a:solidFill>
-                        <a:schemeClr val="dk1"/>
-                      </a:solidFill>
-                      <a:prstDash val="solid"/>
-                      <a:round/>
-                      <a:headEnd len="sm" w="sm" type="none"/>
-                      <a:tailEnd len="sm" w="sm" type="none"/>
-                    </a:lnR>
-                    <a:lnT cap="flat" cmpd="sng" w="9525">
-                      <a:solidFill>
-                        <a:schemeClr val="dk1"/>
-                      </a:solidFill>
-                      <a:prstDash val="solid"/>
-                      <a:round/>
-                      <a:headEnd len="sm" w="sm" type="none"/>
-                      <a:tailEnd len="sm" w="sm" type="none"/>
-                    </a:lnT>
-                    <a:lnB cap="flat" cmpd="sng" w="9525">
-                      <a:solidFill>
-                        <a:schemeClr val="dk1"/>
-                      </a:solidFill>
-                      <a:prstDash val="solid"/>
-                      <a:round/>
-                      <a:headEnd len="sm" w="sm" type="none"/>
-                      <a:tailEnd len="sm" w="sm" type="none"/>
-                    </a:lnB>
-                    <a:solidFill>
-                      <a:srgbClr val="B6D7A8"/>
-                    </a:solidFill>
-                  </a:tcPr>
-                </a:tc>
-              </a:tr>
-              <a:tr h="381000">
-                <a:tc>
-                  <a:txBody>
-                    <a:bodyPr/>
-                    <a:lstStyle/>
-                    <a:p>
-                      <a:pPr indent="0" lvl="0" marL="0" rtl="0" algn="l">
-                        <a:spcBef>
-                          <a:spcPts val="0"/>
-                        </a:spcBef>
-                        <a:spcAft>
-                          <a:spcPts val="0"/>
-                        </a:spcAft>
-                        <a:buNone/>
-                      </a:pPr>
-                      <a:r>
-                        <a:rPr lang="en-US"/>
-                        <a:t>Programación</a:t>
-                      </a:r>
-                      <a:r>
-                        <a:rPr lang="en-US"/>
-                        <a:t> de Citas</a:t>
-                      </a:r>
-                      <a:endParaRPr/>
-                    </a:p>
-                  </a:txBody>
-                  <a:tcPr marT="91425" marB="91425" marR="91425" marL="91425">
-                    <a:lnL cap="flat" cmpd="sng" w="9525">
-                      <a:solidFill>
-                        <a:schemeClr val="dk1"/>
-                      </a:solidFill>
-                      <a:prstDash val="solid"/>
-                      <a:round/>
-                      <a:headEnd len="sm" w="sm" type="none"/>
-                      <a:tailEnd len="sm" w="sm" type="none"/>
-                    </a:lnL>
-                    <a:lnR cap="flat" cmpd="sng" w="9525">
-                      <a:solidFill>
-                        <a:schemeClr val="dk1"/>
-                      </a:solidFill>
-                      <a:prstDash val="solid"/>
-                      <a:round/>
-                      <a:headEnd len="sm" w="sm" type="none"/>
-                      <a:tailEnd len="sm" w="sm" type="none"/>
-                    </a:lnR>
-                    <a:lnT cap="flat" cmpd="sng" w="9525">
-                      <a:solidFill>
-                        <a:schemeClr val="dk1"/>
-                      </a:solidFill>
-                      <a:prstDash val="solid"/>
-                      <a:round/>
-                      <a:headEnd len="sm" w="sm" type="none"/>
-                      <a:tailEnd len="sm" w="sm" type="none"/>
-                    </a:lnT>
-                    <a:lnB cap="flat" cmpd="sng" w="9525">
-                      <a:solidFill>
-                        <a:schemeClr val="dk1"/>
-                      </a:solidFill>
-                      <a:prstDash val="solid"/>
-                      <a:round/>
-                      <a:headEnd len="sm" w="sm" type="none"/>
-                      <a:tailEnd len="sm" w="sm" type="none"/>
-                    </a:lnB>
-                    <a:solidFill>
-                      <a:srgbClr val="B6D7A8"/>
-                    </a:solidFill>
-                  </a:tcPr>
-                </a:tc>
-                <a:tc>
-                  <a:txBody>
-                    <a:bodyPr/>
-                    <a:lstStyle/>
-                    <a:p>
-                      <a:pPr indent="0" lvl="0" marL="0" rtl="0" algn="l">
-                        <a:spcBef>
-                          <a:spcPts val="0"/>
-                        </a:spcBef>
-                        <a:spcAft>
-                          <a:spcPts val="0"/>
-                        </a:spcAft>
-                        <a:buNone/>
-                      </a:pPr>
-                      <a:r>
-                        <a:rPr lang="en-US"/>
-                        <a:t>Permitir la solicitud de citas, contando con la disponibilidad horaria de los empleados y el horario establecido por el administrador</a:t>
-                      </a:r>
-                      <a:endParaRPr/>
-                    </a:p>
-                  </a:txBody>
-                  <a:tcPr marT="91425" marB="91425" marR="91425" marL="91425">
-                    <a:lnL cap="flat" cmpd="sng" w="9525">
-                      <a:solidFill>
-                        <a:schemeClr val="dk1"/>
-                      </a:solidFill>
-                      <a:prstDash val="solid"/>
-                      <a:round/>
-                      <a:headEnd len="sm" w="sm" type="none"/>
-                      <a:tailEnd len="sm" w="sm" type="none"/>
-                    </a:lnL>
-                    <a:lnR cap="flat" cmpd="sng" w="9525">
-                      <a:solidFill>
-                        <a:schemeClr val="dk1"/>
-                      </a:solidFill>
-                      <a:prstDash val="solid"/>
-                      <a:round/>
-                      <a:headEnd len="sm" w="sm" type="none"/>
-                      <a:tailEnd len="sm" w="sm" type="none"/>
-                    </a:lnR>
-                    <a:lnT cap="flat" cmpd="sng" w="9525">
-                      <a:solidFill>
-                        <a:schemeClr val="dk1"/>
-                      </a:solidFill>
-                      <a:prstDash val="solid"/>
-                      <a:round/>
-                      <a:headEnd len="sm" w="sm" type="none"/>
-                      <a:tailEnd len="sm" w="sm" type="none"/>
-                    </a:lnT>
-                    <a:lnB cap="flat" cmpd="sng" w="9525">
-                      <a:solidFill>
-                        <a:schemeClr val="dk1"/>
-                      </a:solidFill>
-                      <a:prstDash val="solid"/>
-                      <a:round/>
-                      <a:headEnd len="sm" w="sm" type="none"/>
-                      <a:tailEnd len="sm" w="sm" type="none"/>
-                    </a:lnB>
-                    <a:solidFill>
-                      <a:srgbClr val="B6D7A8"/>
-                    </a:solidFill>
-                  </a:tcPr>
-                </a:tc>
-              </a:tr>
-              <a:tr h="381000">
-                <a:tc>
-                  <a:txBody>
-                    <a:bodyPr/>
-                    <a:lstStyle/>
-                    <a:p>
-                      <a:pPr indent="0" lvl="0" marL="0" rtl="0" algn="l">
-                        <a:spcBef>
-                          <a:spcPts val="0"/>
-                        </a:spcBef>
-                        <a:spcAft>
-                          <a:spcPts val="0"/>
-                        </a:spcAft>
-                        <a:buNone/>
-                      </a:pPr>
-                      <a:r>
-                        <a:rPr lang="en-US"/>
-                        <a:t>Gestión</a:t>
-                      </a:r>
-                      <a:r>
-                        <a:rPr lang="en-US"/>
-                        <a:t> de Insumos</a:t>
-                      </a:r>
-                      <a:endParaRPr/>
-                    </a:p>
-                  </a:txBody>
-                  <a:tcPr marT="91425" marB="91425" marR="91425" marL="91425">
-                    <a:lnL cap="flat" cmpd="sng" w="9525">
-                      <a:solidFill>
-                        <a:schemeClr val="dk1"/>
-                      </a:solidFill>
-                      <a:prstDash val="solid"/>
-                      <a:round/>
-                      <a:headEnd len="sm" w="sm" type="none"/>
-                      <a:tailEnd len="sm" w="sm" type="none"/>
-                    </a:lnL>
-                    <a:lnR cap="flat" cmpd="sng" w="9525">
-                      <a:solidFill>
-                        <a:schemeClr val="dk1"/>
-                      </a:solidFill>
-                      <a:prstDash val="solid"/>
-                      <a:round/>
-                      <a:headEnd len="sm" w="sm" type="none"/>
-                      <a:tailEnd len="sm" w="sm" type="none"/>
-                    </a:lnR>
-                    <a:lnT cap="flat" cmpd="sng" w="9525">
-                      <a:solidFill>
-                        <a:schemeClr val="dk1"/>
-                      </a:solidFill>
-                      <a:prstDash val="solid"/>
-                      <a:round/>
-                      <a:headEnd len="sm" w="sm" type="none"/>
-                      <a:tailEnd len="sm" w="sm" type="none"/>
-                    </a:lnT>
-                    <a:lnB cap="flat" cmpd="sng" w="9525">
-                      <a:solidFill>
-                        <a:schemeClr val="dk1"/>
-                      </a:solidFill>
-                      <a:prstDash val="solid"/>
-                      <a:round/>
-                      <a:headEnd len="sm" w="sm" type="none"/>
-                      <a:tailEnd len="sm" w="sm" type="none"/>
-                    </a:lnB>
-                    <a:solidFill>
-                      <a:srgbClr val="B6D7A8"/>
-                    </a:solidFill>
-                  </a:tcPr>
-                </a:tc>
-                <a:tc>
-                  <a:txBody>
-                    <a:bodyPr/>
-                    <a:lstStyle/>
-                    <a:p>
-                      <a:pPr indent="0" lvl="0" marL="0" rtl="0" algn="l">
-                        <a:spcBef>
-                          <a:spcPts val="0"/>
-                        </a:spcBef>
-                        <a:spcAft>
-                          <a:spcPts val="0"/>
-                        </a:spcAft>
-                        <a:buNone/>
-                      </a:pPr>
-                      <a:r>
-                        <a:rPr lang="en-US"/>
-                        <a:t>Mantener</a:t>
-                      </a:r>
-                      <a:r>
-                        <a:rPr lang="en-US"/>
-                        <a:t> un </a:t>
-                      </a:r>
-                      <a:r>
-                        <a:rPr lang="en-US"/>
-                        <a:t>catálogo</a:t>
-                      </a:r>
-                      <a:r>
-                        <a:rPr lang="en-US"/>
-                        <a:t> de los insumos dentro de </a:t>
-                      </a:r>
-                      <a:r>
-                        <a:rPr lang="en-US"/>
-                        <a:t>él</a:t>
-                      </a:r>
-                      <a:r>
-                        <a:rPr lang="en-US"/>
-                        <a:t> spa, permitiendo la </a:t>
-                      </a:r>
-                      <a:r>
-                        <a:rPr lang="en-US"/>
-                        <a:t>actualización</a:t>
-                      </a:r>
-                      <a:r>
-                        <a:rPr lang="en-US"/>
-                        <a:t> de estos mismos por parte del administrador</a:t>
-                      </a:r>
-                      <a:endParaRPr/>
-                    </a:p>
-                  </a:txBody>
-                  <a:tcPr marT="91425" marB="91425" marR="91425" marL="91425">
-                    <a:lnL cap="flat" cmpd="sng" w="9525">
-                      <a:solidFill>
-                        <a:schemeClr val="dk1"/>
-                      </a:solidFill>
-                      <a:prstDash val="solid"/>
-                      <a:round/>
-                      <a:headEnd len="sm" w="sm" type="none"/>
-                      <a:tailEnd len="sm" w="sm" type="none"/>
-                    </a:lnL>
-                    <a:lnR cap="flat" cmpd="sng" w="9525">
-                      <a:solidFill>
-                        <a:schemeClr val="dk1"/>
-                      </a:solidFill>
-                      <a:prstDash val="solid"/>
-                      <a:round/>
-                      <a:headEnd len="sm" w="sm" type="none"/>
-                      <a:tailEnd len="sm" w="sm" type="none"/>
-                    </a:lnR>
-                    <a:lnT cap="flat" cmpd="sng" w="9525">
-                      <a:solidFill>
-                        <a:schemeClr val="dk1"/>
-                      </a:solidFill>
-                      <a:prstDash val="solid"/>
-                      <a:round/>
-                      <a:headEnd len="sm" w="sm" type="none"/>
-                      <a:tailEnd len="sm" w="sm" type="none"/>
-                    </a:lnT>
-                    <a:lnB cap="flat" cmpd="sng" w="9525">
-                      <a:solidFill>
-                        <a:schemeClr val="dk1"/>
-                      </a:solidFill>
-                      <a:prstDash val="solid"/>
-                      <a:round/>
-                      <a:headEnd len="sm" w="sm" type="none"/>
-                      <a:tailEnd len="sm" w="sm" type="none"/>
-                    </a:lnB>
-                    <a:solidFill>
-                      <a:srgbClr val="B6D7A8"/>
-                    </a:solidFill>
-                  </a:tcPr>
-                </a:tc>
-              </a:tr>
-              <a:tr h="381000">
-                <a:tc>
-                  <a:txBody>
-                    <a:bodyPr/>
-                    <a:lstStyle/>
-                    <a:p>
-                      <a:pPr indent="0" lvl="0" marL="0" rtl="0" algn="l">
-                        <a:spcBef>
-                          <a:spcPts val="0"/>
-                        </a:spcBef>
-                        <a:spcAft>
-                          <a:spcPts val="0"/>
-                        </a:spcAft>
-                        <a:buNone/>
-                      </a:pPr>
-                      <a:r>
-                        <a:rPr lang="en-US"/>
-                        <a:t>Gestión</a:t>
-                      </a:r>
-                      <a:r>
-                        <a:rPr lang="en-US"/>
-                        <a:t> de Recibos</a:t>
-                      </a:r>
-                      <a:endParaRPr/>
-                    </a:p>
-                  </a:txBody>
-                  <a:tcPr marT="91425" marB="91425" marR="91425" marL="91425">
-                    <a:lnL cap="flat" cmpd="sng" w="9525">
-                      <a:solidFill>
-                        <a:schemeClr val="dk1"/>
-                      </a:solidFill>
-                      <a:prstDash val="solid"/>
-                      <a:round/>
-                      <a:headEnd len="sm" w="sm" type="none"/>
-                      <a:tailEnd len="sm" w="sm" type="none"/>
-                    </a:lnL>
-                    <a:lnR cap="flat" cmpd="sng" w="9525">
-                      <a:solidFill>
-                        <a:schemeClr val="dk1"/>
-                      </a:solidFill>
-                      <a:prstDash val="solid"/>
-                      <a:round/>
-                      <a:headEnd len="sm" w="sm" type="none"/>
-                      <a:tailEnd len="sm" w="sm" type="none"/>
-                    </a:lnR>
-                    <a:lnT cap="flat" cmpd="sng" w="9525">
-                      <a:solidFill>
-                        <a:schemeClr val="dk1"/>
-                      </a:solidFill>
-                      <a:prstDash val="solid"/>
-                      <a:round/>
-                      <a:headEnd len="sm" w="sm" type="none"/>
-                      <a:tailEnd len="sm" w="sm" type="none"/>
-                    </a:lnT>
-                    <a:lnB cap="flat" cmpd="sng" w="9525">
-                      <a:solidFill>
-                        <a:schemeClr val="dk1"/>
-                      </a:solidFill>
-                      <a:prstDash val="solid"/>
-                      <a:round/>
-                      <a:headEnd len="sm" w="sm" type="none"/>
-                      <a:tailEnd len="sm" w="sm" type="none"/>
-                    </a:lnB>
-                    <a:solidFill>
-                      <a:srgbClr val="B6D7A8"/>
-                    </a:solidFill>
-                  </a:tcPr>
-                </a:tc>
-                <a:tc>
-                  <a:txBody>
-                    <a:bodyPr/>
-                    <a:lstStyle/>
-                    <a:p>
-                      <a:pPr indent="0" lvl="0" marL="0" rtl="0" algn="l">
-                        <a:spcBef>
-                          <a:spcPts val="0"/>
-                        </a:spcBef>
-                        <a:spcAft>
-                          <a:spcPts val="0"/>
-                        </a:spcAft>
-                        <a:buNone/>
-                      </a:pPr>
-                      <a:r>
-                        <a:rPr lang="en-US"/>
-                        <a:t>Facilitar el registro de servicios realizados por el spa, permitiendo una </a:t>
-                      </a:r>
-                      <a:r>
-                        <a:rPr lang="en-US"/>
-                        <a:t>creación</a:t>
-                      </a:r>
-                      <a:r>
-                        <a:rPr lang="en-US"/>
-                        <a:t> de recibos para cada </a:t>
-                      </a:r>
-                      <a:r>
-                        <a:rPr lang="en-US"/>
-                        <a:t>usuario validando los precios establecidos por el administrador</a:t>
-                      </a:r>
-                      <a:endParaRPr/>
-                    </a:p>
-                  </a:txBody>
-                  <a:tcPr marT="91425" marB="91425" marR="91425" marL="91425">
-                    <a:lnL cap="flat" cmpd="sng" w="9525">
-                      <a:solidFill>
-                        <a:schemeClr val="dk1"/>
-                      </a:solidFill>
-                      <a:prstDash val="solid"/>
-                      <a:round/>
-                      <a:headEnd len="sm" w="sm" type="none"/>
-                      <a:tailEnd len="sm" w="sm" type="none"/>
-                    </a:lnL>
-                    <a:lnR cap="flat" cmpd="sng" w="9525">
-                      <a:solidFill>
-                        <a:schemeClr val="dk1"/>
-                      </a:solidFill>
-                      <a:prstDash val="solid"/>
-                      <a:round/>
-                      <a:headEnd len="sm" w="sm" type="none"/>
-                      <a:tailEnd len="sm" w="sm" type="none"/>
-                    </a:lnR>
-                    <a:lnT cap="flat" cmpd="sng" w="9525">
-                      <a:solidFill>
-                        <a:schemeClr val="dk1"/>
-                      </a:solidFill>
-                      <a:prstDash val="solid"/>
-                      <a:round/>
-                      <a:headEnd len="sm" w="sm" type="none"/>
-                      <a:tailEnd len="sm" w="sm" type="none"/>
-                    </a:lnT>
-                    <a:lnB cap="flat" cmpd="sng" w="9525">
-                      <a:solidFill>
-                        <a:schemeClr val="dk1"/>
-                      </a:solidFill>
-                      <a:prstDash val="solid"/>
-                      <a:round/>
-                      <a:headEnd len="sm" w="sm" type="none"/>
-                      <a:tailEnd len="sm" w="sm" type="none"/>
-                    </a:lnB>
-                    <a:solidFill>
-                      <a:srgbClr val="B6D7A8"/>
-                    </a:solidFill>
-                  </a:tcPr>
-                </a:tc>
-              </a:tr>
-              <a:tr h="381000">
-                <a:tc>
-                  <a:txBody>
-                    <a:bodyPr/>
-                    <a:lstStyle/>
-                    <a:p>
-                      <a:pPr indent="0" lvl="0" marL="0" rtl="0" algn="l">
-                        <a:spcBef>
-                          <a:spcPts val="0"/>
-                        </a:spcBef>
-                        <a:spcAft>
-                          <a:spcPts val="0"/>
-                        </a:spcAft>
-                        <a:buNone/>
-                      </a:pPr>
-                      <a:r>
-                        <a:rPr lang="en-US"/>
-                        <a:t>Generación</a:t>
-                      </a:r>
-                      <a:r>
-                        <a:rPr lang="en-US"/>
-                        <a:t> de Reportes</a:t>
-                      </a:r>
-                      <a:endParaRPr/>
-                    </a:p>
-                  </a:txBody>
-                  <a:tcPr marT="91425" marB="91425" marR="91425" marL="91425">
-                    <a:lnL cap="flat" cmpd="sng" w="9525">
-                      <a:solidFill>
-                        <a:schemeClr val="dk1"/>
-                      </a:solidFill>
-                      <a:prstDash val="solid"/>
-                      <a:round/>
-                      <a:headEnd len="sm" w="sm" type="none"/>
-                      <a:tailEnd len="sm" w="sm" type="none"/>
-                    </a:lnL>
-                    <a:lnR cap="flat" cmpd="sng" w="9525">
-                      <a:solidFill>
-                        <a:schemeClr val="dk1"/>
-                      </a:solidFill>
-                      <a:prstDash val="solid"/>
-                      <a:round/>
-                      <a:headEnd len="sm" w="sm" type="none"/>
-                      <a:tailEnd len="sm" w="sm" type="none"/>
-                    </a:lnR>
-                    <a:lnT cap="flat" cmpd="sng" w="9525">
-                      <a:solidFill>
-                        <a:schemeClr val="dk1"/>
-                      </a:solidFill>
-                      <a:prstDash val="solid"/>
-                      <a:round/>
-                      <a:headEnd len="sm" w="sm" type="none"/>
-                      <a:tailEnd len="sm" w="sm" type="none"/>
-                    </a:lnT>
-                    <a:lnB cap="flat" cmpd="sng" w="9525">
-                      <a:solidFill>
-                        <a:schemeClr val="dk1"/>
-                      </a:solidFill>
-                      <a:prstDash val="solid"/>
-                      <a:round/>
-                      <a:headEnd len="sm" w="sm" type="none"/>
-                      <a:tailEnd len="sm" w="sm" type="none"/>
-                    </a:lnB>
-                    <a:solidFill>
-                      <a:srgbClr val="B6D7A8"/>
-                    </a:solidFill>
-                  </a:tcPr>
-                </a:tc>
-                <a:tc>
-                  <a:txBody>
-                    <a:bodyPr/>
-                    <a:lstStyle/>
-                    <a:p>
-                      <a:pPr indent="0" lvl="0" marL="0" rtl="0" algn="l">
-                        <a:spcBef>
-                          <a:spcPts val="0"/>
-                        </a:spcBef>
-                        <a:spcAft>
-                          <a:spcPts val="0"/>
-                        </a:spcAft>
-                        <a:buNone/>
-                      </a:pPr>
-                      <a:r>
-                        <a:rPr lang="en-US"/>
-                        <a:t>Permite crear indicadores, evaluar el desempeño de los empleados, visualizar resultados y descargar reportes.</a:t>
-                      </a:r>
-                      <a:endParaRPr/>
-                    </a:p>
-                  </a:txBody>
-                  <a:tcPr marT="91425" marB="91425" marR="91425" marL="91425">
-                    <a:lnL cap="flat" cmpd="sng" w="9525">
-                      <a:solidFill>
-                        <a:schemeClr val="dk1"/>
-                      </a:solidFill>
-                      <a:prstDash val="solid"/>
-                      <a:round/>
-                      <a:headEnd len="sm" w="sm" type="none"/>
-                      <a:tailEnd len="sm" w="sm" type="none"/>
-                    </a:lnL>
-                    <a:lnR cap="flat" cmpd="sng" w="9525">
-                      <a:solidFill>
-                        <a:schemeClr val="dk1"/>
-                      </a:solidFill>
-                      <a:prstDash val="solid"/>
-                      <a:round/>
-                      <a:headEnd len="sm" w="sm" type="none"/>
-                      <a:tailEnd len="sm" w="sm" type="none"/>
-                    </a:lnR>
-                    <a:lnT cap="flat" cmpd="sng" w="9525">
-                      <a:solidFill>
-                        <a:schemeClr val="dk1"/>
-                      </a:solidFill>
-                      <a:prstDash val="solid"/>
-                      <a:round/>
-                      <a:headEnd len="sm" w="sm" type="none"/>
-                      <a:tailEnd len="sm" w="sm" type="none"/>
-                    </a:lnT>
-                    <a:lnB cap="flat" cmpd="sng" w="9525">
-                      <a:solidFill>
-                        <a:schemeClr val="dk1"/>
-                      </a:solidFill>
-                      <a:prstDash val="solid"/>
-                      <a:round/>
-                      <a:headEnd len="sm" w="sm" type="none"/>
-                      <a:tailEnd len="sm" w="sm" type="none"/>
-                    </a:lnB>
-                    <a:solidFill>
-                      <a:srgbClr val="B6D7A8"/>
-                    </a:solidFill>
-                  </a:tcPr>
-                </a:tc>
-              </a:tr>
-            </a:tbl>
-          </a:graphicData>
-        </a:graphic>
-      </p:graphicFrame>
       <p:sp>
         <p:nvSpPr>
-          <p:cNvPr id="180" name="Google Shape;180;g395b38490da_0_0"/>
+          <p:cNvPr id="178" name="Google Shape;178;p9"/>
+          <p:cNvSpPr/>
+          <p:nvPr/>
+        </p:nvSpPr>
+        <p:spPr>
+          <a:xfrm>
+            <a:off x="0" y="0"/>
+            <a:ext cx="12188952" cy="6858000"/>
+          </a:xfrm>
+          <a:prstGeom prst="rect">
+            <a:avLst/>
+          </a:prstGeom>
+          <a:solidFill>
+            <a:schemeClr val="lt1"/>
+          </a:solidFill>
+          <a:ln>
+            <a:noFill/>
+          </a:ln>
+        </p:spPr>
+        <p:txBody>
+          <a:bodyPr anchorCtr="0" anchor="ctr" bIns="45700" lIns="91425" spcFirstLastPara="1" rIns="91425" wrap="square" tIns="45700">
+            <a:noAutofit/>
+          </a:bodyPr>
+          <a:lstStyle/>
+          <a:p>
+            <a:pPr indent="0" lvl="0" marL="0" marR="0" rtl="0" algn="ctr">
+              <a:lnSpc>
+                <a:spcPct val="100000"/>
+              </a:lnSpc>
+              <a:spcBef>
+                <a:spcPts val="0"/>
+              </a:spcBef>
+              <a:spcAft>
+                <a:spcPts val="0"/>
+              </a:spcAft>
+              <a:buClr>
+                <a:srgbClr val="000000"/>
+              </a:buClr>
+              <a:buSzPts val="1800"/>
+              <a:buFont typeface="Arial"/>
+              <a:buNone/>
+            </a:pPr>
+            <a:r>
+              <a:t/>
+            </a:r>
+            <a:endParaRPr b="0" i="0" sz="1800" u="none" cap="none" strike="noStrike">
+              <a:solidFill>
+                <a:schemeClr val="lt1"/>
+              </a:solidFill>
+              <a:latin typeface="Calibri"/>
+              <a:ea typeface="Calibri"/>
+              <a:cs typeface="Calibri"/>
+              <a:sym typeface="Calibri"/>
+            </a:endParaRPr>
+          </a:p>
+        </p:txBody>
+      </p:sp>
+      <p:sp>
+        <p:nvSpPr>
+          <p:cNvPr id="179" name="Google Shape;179;p9"/>
           <p:cNvSpPr txBox="1"/>
           <p:nvPr/>
         </p:nvSpPr>
         <p:spPr>
           <a:xfrm>
-            <a:off x="2678600" y="529075"/>
-            <a:ext cx="6147600" cy="831000"/>
+            <a:off x="5297762" y="329184"/>
+            <a:ext cx="6251110" cy="1783080"/>
           </a:xfrm>
           <a:prstGeom prst="rect">
             <a:avLst/>
@@ -27040,30 +25260,30 @@
           </a:ln>
         </p:spPr>
         <p:txBody>
-          <a:bodyPr anchorCtr="0" anchor="t" bIns="45700" lIns="91425" spcFirstLastPara="1" rIns="91425" wrap="square" tIns="45700">
-            <a:spAutoFit/>
+          <a:bodyPr anchorCtr="0" anchor="b" bIns="45700" lIns="91425" spcFirstLastPara="1" rIns="91425" wrap="square" tIns="45700">
+            <a:normAutofit/>
           </a:bodyPr>
           <a:lstStyle/>
           <a:p>
             <a:pPr indent="0" lvl="0" marL="0" marR="0" rtl="0" algn="ctr">
               <a:lnSpc>
-                <a:spcPct val="100000"/>
-              </a:lnSpc>
-              <a:spcBef>
-                <a:spcPts val="0"/>
-              </a:spcBef>
-              <a:spcAft>
-                <a:spcPts val="0"/>
-              </a:spcAft>
-              <a:buClr>
-                <a:schemeClr val="dk1"/>
-              </a:buClr>
-              <a:buSzPts val="4800"/>
-              <a:buFont typeface="Comic Sans MS"/>
+                <a:spcPct val="90000"/>
+              </a:lnSpc>
+              <a:spcBef>
+                <a:spcPts val="0"/>
+              </a:spcBef>
+              <a:spcAft>
+                <a:spcPts val="0"/>
+              </a:spcAft>
+              <a:buClr>
+                <a:srgbClr val="000000"/>
+              </a:buClr>
+              <a:buSzPts val="5400"/>
+              <a:buFont typeface="Arial"/>
               <a:buNone/>
             </a:pPr>
             <a:r>
-              <a:rPr b="1" lang="en-US" sz="4800">
+              <a:rPr b="1" i="0" lang="en-US" sz="5400" u="none" cap="none" strike="noStrike">
                 <a:solidFill>
                   <a:schemeClr val="dk1"/>
                 </a:solidFill>
@@ -27072,10 +25292,38 @@
                 <a:cs typeface="Comic Sans MS"/>
                 <a:sym typeface="Comic Sans MS"/>
               </a:rPr>
-              <a:t>Módulos</a:t>
+              <a:t>Alcance del</a:t>
             </a:r>
+            <a:endParaRPr b="0" i="0" sz="1400" u="none" cap="none" strike="noStrike">
+              <a:solidFill>
+                <a:srgbClr val="000000"/>
+              </a:solidFill>
+              <a:latin typeface="Arial"/>
+              <a:ea typeface="Arial"/>
+              <a:cs typeface="Arial"/>
+              <a:sym typeface="Arial"/>
+            </a:endParaRPr>
+          </a:p>
+          <a:p>
+            <a:pPr indent="0" lvl="0" marL="0" marR="0" rtl="0" algn="ctr">
+              <a:lnSpc>
+                <a:spcPct val="90000"/>
+              </a:lnSpc>
+              <a:spcBef>
+                <a:spcPts val="600"/>
+              </a:spcBef>
+              <a:spcAft>
+                <a:spcPts val="0"/>
+              </a:spcAft>
+              <a:buClr>
+                <a:srgbClr val="000000"/>
+              </a:buClr>
+              <a:buSzPts val="5400"/>
+              <a:buFont typeface="Arial"/>
+              <a:buNone/>
+            </a:pPr>
             <a:r>
-              <a:rPr b="1" lang="en-US" sz="4800">
+              <a:rPr b="1" i="0" lang="en-US" sz="5400" u="none" cap="none" strike="noStrike">
                 <a:solidFill>
                   <a:schemeClr val="dk1"/>
                 </a:solidFill>
@@ -27084,11 +25332,11 @@
                 <a:cs typeface="Comic Sans MS"/>
                 <a:sym typeface="Comic Sans MS"/>
               </a:rPr>
-              <a:t> del sistema</a:t>
+              <a:t>Proyecto</a:t>
             </a:r>
-            <a:endParaRPr b="1" i="0" sz="4800" u="none" cap="none" strike="noStrike">
+            <a:endParaRPr b="1" i="0" sz="5400" u="none" cap="none" strike="noStrike">
               <a:solidFill>
-                <a:schemeClr val="lt1"/>
+                <a:schemeClr val="dk1"/>
               </a:solidFill>
               <a:latin typeface="Comic Sans MS"/>
               <a:ea typeface="Comic Sans MS"/>
@@ -27098,16 +25346,151 @@
           </a:p>
         </p:txBody>
       </p:sp>
+      <p:pic>
+        <p:nvPicPr>
+          <p:cNvPr descr="Diagrama&#10;&#10;El contenido generado por IA puede ser incorrecto." id="180" name="Google Shape;180;p9"/>
+          <p:cNvPicPr preferRelativeResize="0"/>
+          <p:nvPr/>
+        </p:nvPicPr>
+        <p:blipFill rotWithShape="1">
+          <a:blip r:embed="rId3">
+            <a:alphaModFix/>
+          </a:blip>
+          <a:srcRect b="17170" l="0" r="-1" t="0"/>
+          <a:stretch/>
+        </p:blipFill>
+        <p:spPr>
+          <a:xfrm>
+            <a:off x="0" y="-9515"/>
+            <a:ext cx="4657344" cy="6857990"/>
+          </a:xfrm>
+          <a:custGeom>
+            <a:rect b="b" l="l" r="r" t="t"/>
+            <a:pathLst>
+              <a:path extrusionOk="0" h="6858000" w="4657344">
+                <a:moveTo>
+                  <a:pt x="0" y="0"/>
+                </a:moveTo>
+                <a:lnTo>
+                  <a:pt x="3429755" y="0"/>
+                </a:lnTo>
+                <a:lnTo>
+                  <a:pt x="3526016" y="148742"/>
+                </a:lnTo>
+                <a:cubicBezTo>
+                  <a:pt x="3657740" y="365513"/>
+                  <a:pt x="3777402" y="589569"/>
+                  <a:pt x="3886489" y="819975"/>
+                </a:cubicBezTo>
+                <a:cubicBezTo>
+                  <a:pt x="3891856" y="833492"/>
+                  <a:pt x="3900663" y="845393"/>
+                  <a:pt x="3912049" y="854514"/>
+                </a:cubicBezTo>
+                <a:cubicBezTo>
+                  <a:pt x="3897352" y="819849"/>
+                  <a:pt x="3883037" y="784928"/>
+                  <a:pt x="3868083" y="750263"/>
+                </a:cubicBezTo>
+                <a:cubicBezTo>
+                  <a:pt x="3806989" y="608712"/>
+                  <a:pt x="3742478" y="469145"/>
+                  <a:pt x="3674155" y="331786"/>
+                </a:cubicBezTo>
+                <a:lnTo>
+                  <a:pt x="3496656" y="0"/>
+                </a:lnTo>
+                <a:lnTo>
+                  <a:pt x="3554371" y="0"/>
+                </a:lnTo>
+                <a:lnTo>
+                  <a:pt x="3661621" y="196614"/>
+                </a:lnTo>
+                <a:cubicBezTo>
+                  <a:pt x="3856899" y="573253"/>
+                  <a:pt x="4021071" y="966066"/>
+                  <a:pt x="4161279" y="1371196"/>
+                </a:cubicBezTo>
+                <a:cubicBezTo>
+                  <a:pt x="4379525" y="2007265"/>
+                  <a:pt x="4530141" y="2664286"/>
+                  <a:pt x="4610660" y="3331516"/>
+                </a:cubicBezTo>
+                <a:cubicBezTo>
+                  <a:pt x="4652837" y="3672965"/>
+                  <a:pt x="4671625" y="4013908"/>
+                  <a:pt x="4645040" y="4357388"/>
+                </a:cubicBezTo>
+                <a:cubicBezTo>
+                  <a:pt x="4613599" y="4758899"/>
+                  <a:pt x="4566181" y="5157998"/>
+                  <a:pt x="4485789" y="5552906"/>
+                </a:cubicBezTo>
+                <a:cubicBezTo>
+                  <a:pt x="4397121" y="5988893"/>
+                  <a:pt x="4276748" y="6414594"/>
+                  <a:pt x="4117769" y="6828295"/>
+                </a:cubicBezTo>
+                <a:lnTo>
+                  <a:pt x="4105288" y="6858000"/>
+                </a:lnTo>
+                <a:lnTo>
+                  <a:pt x="4052520" y="6858000"/>
+                </a:lnTo>
+                <a:lnTo>
+                  <a:pt x="4059369" y="6841549"/>
+                </a:lnTo>
+                <a:cubicBezTo>
+                  <a:pt x="4147276" y="6614016"/>
+                  <a:pt x="4224193" y="6380817"/>
+                  <a:pt x="4291518" y="6142729"/>
+                </a:cubicBezTo>
+                <a:cubicBezTo>
+                  <a:pt x="4350055" y="5935370"/>
+                  <a:pt x="4393256" y="5723695"/>
+                  <a:pt x="4443357" y="5513923"/>
+                </a:cubicBezTo>
+                <a:cubicBezTo>
+                  <a:pt x="4444541" y="5502788"/>
+                  <a:pt x="4445137" y="5491601"/>
+                  <a:pt x="4445146" y="5480401"/>
+                </a:cubicBezTo>
+                <a:cubicBezTo>
+                  <a:pt x="4408465" y="5607635"/>
+                  <a:pt x="4379196" y="5719759"/>
+                  <a:pt x="4344559" y="5830359"/>
+                </a:cubicBezTo>
+                <a:cubicBezTo>
+                  <a:pt x="4254261" y="6118381"/>
+                  <a:pt x="4150112" y="6398531"/>
+                  <a:pt x="4031702" y="6670527"/>
+                </a:cubicBezTo>
+                <a:lnTo>
+                  <a:pt x="3943824" y="6858000"/>
+                </a:lnTo>
+                <a:lnTo>
+                  <a:pt x="0" y="6858000"/>
+                </a:lnTo>
+                <a:close/>
+              </a:path>
+            </a:pathLst>
+          </a:custGeom>
+          <a:noFill/>
+          <a:ln>
+            <a:noFill/>
+          </a:ln>
+        </p:spPr>
+      </p:pic>
       <p:sp>
         <p:nvSpPr>
-          <p:cNvPr id="181" name="Google Shape;181;g395b38490da_0_0"/>
+          <p:cNvPr id="181" name="Google Shape;181;p9"/>
           <p:cNvSpPr/>
           <p:nvPr/>
         </p:nvSpPr>
         <p:spPr>
           <a:xfrm>
-            <a:off x="3536625" y="1608408"/>
-            <a:ext cx="4243589" cy="59482"/>
+            <a:off x="5297762" y="2374947"/>
+            <a:ext cx="4243589" cy="18288"/>
           </a:xfrm>
           <a:custGeom>
             <a:rect b="b" l="l" r="r" t="t"/>
@@ -27333,6 +25716,222 @@
               <a:ea typeface="Calibri"/>
               <a:cs typeface="Calibri"/>
               <a:sym typeface="Calibri"/>
+            </a:endParaRPr>
+          </a:p>
+        </p:txBody>
+      </p:sp>
+      <p:sp>
+        <p:nvSpPr>
+          <p:cNvPr id="182" name="Google Shape;182;p9"/>
+          <p:cNvSpPr txBox="1"/>
+          <p:nvPr/>
+        </p:nvSpPr>
+        <p:spPr>
+          <a:xfrm>
+            <a:off x="9985925" y="2614560"/>
+            <a:ext cx="1562778" cy="11198543"/>
+          </a:xfrm>
+          <a:prstGeom prst="rect">
+            <a:avLst/>
+          </a:prstGeom>
+          <a:noFill/>
+          <a:ln>
+            <a:noFill/>
+          </a:ln>
+        </p:spPr>
+        <p:txBody>
+          <a:bodyPr anchorCtr="0" anchor="t" bIns="45700" lIns="91425" spcFirstLastPara="1" rIns="91425" wrap="square" tIns="45700">
+            <a:normAutofit/>
+          </a:bodyPr>
+          <a:lstStyle/>
+          <a:p>
+            <a:pPr indent="0" lvl="0" marL="0" marR="0" rtl="0" algn="l">
+              <a:lnSpc>
+                <a:spcPct val="90000"/>
+              </a:lnSpc>
+              <a:spcBef>
+                <a:spcPts val="0"/>
+              </a:spcBef>
+              <a:spcAft>
+                <a:spcPts val="0"/>
+              </a:spcAft>
+              <a:buClr>
+                <a:srgbClr val="000000"/>
+              </a:buClr>
+              <a:buSzPts val="2200"/>
+              <a:buFont typeface="Arial"/>
+              <a:buNone/>
+            </a:pPr>
+            <a:r>
+              <a:t/>
+            </a:r>
+            <a:endParaRPr b="1" i="0" sz="2200" u="none" cap="none" strike="noStrike">
+              <a:solidFill>
+                <a:schemeClr val="dk1"/>
+              </a:solidFill>
+              <a:latin typeface="Times New Roman"/>
+              <a:ea typeface="Times New Roman"/>
+              <a:cs typeface="Times New Roman"/>
+              <a:sym typeface="Times New Roman"/>
+            </a:endParaRPr>
+          </a:p>
+          <a:p>
+            <a:pPr indent="139700" lvl="0" marL="0" marR="0" rtl="0" algn="l">
+              <a:lnSpc>
+                <a:spcPct val="90000"/>
+              </a:lnSpc>
+              <a:spcBef>
+                <a:spcPts val="600"/>
+              </a:spcBef>
+              <a:spcAft>
+                <a:spcPts val="0"/>
+              </a:spcAft>
+              <a:buClr>
+                <a:schemeClr val="dk1"/>
+              </a:buClr>
+              <a:buSzPts val="2200"/>
+              <a:buFont typeface="Arial"/>
+              <a:buNone/>
+            </a:pPr>
+            <a:r>
+              <a:t/>
+            </a:r>
+            <a:endParaRPr b="0" i="0" sz="2200" u="none" cap="none" strike="noStrike">
+              <a:solidFill>
+                <a:schemeClr val="dk1"/>
+              </a:solidFill>
+              <a:latin typeface="Calibri"/>
+              <a:ea typeface="Calibri"/>
+              <a:cs typeface="Calibri"/>
+              <a:sym typeface="Calibri"/>
+            </a:endParaRPr>
+          </a:p>
+          <a:p>
+            <a:pPr indent="0" lvl="0" marL="0" marR="0" rtl="0" algn="l">
+              <a:lnSpc>
+                <a:spcPct val="90000"/>
+              </a:lnSpc>
+              <a:spcBef>
+                <a:spcPts val="600"/>
+              </a:spcBef>
+              <a:spcAft>
+                <a:spcPts val="0"/>
+              </a:spcAft>
+              <a:buClr>
+                <a:srgbClr val="000000"/>
+              </a:buClr>
+              <a:buSzPts val="2200"/>
+              <a:buFont typeface="Arial"/>
+              <a:buNone/>
+            </a:pPr>
+            <a:r>
+              <a:t/>
+            </a:r>
+            <a:endParaRPr b="0" i="0" sz="2200" u="none" cap="none" strike="noStrike">
+              <a:solidFill>
+                <a:schemeClr val="dk1"/>
+              </a:solidFill>
+              <a:latin typeface="Calibri"/>
+              <a:ea typeface="Calibri"/>
+              <a:cs typeface="Calibri"/>
+              <a:sym typeface="Calibri"/>
+            </a:endParaRPr>
+          </a:p>
+        </p:txBody>
+      </p:sp>
+      <p:sp>
+        <p:nvSpPr>
+          <p:cNvPr id="183" name="Google Shape;183;p9"/>
+          <p:cNvSpPr/>
+          <p:nvPr/>
+        </p:nvSpPr>
+        <p:spPr>
+          <a:xfrm>
+            <a:off x="5412862" y="3146963"/>
+            <a:ext cx="6436237" cy="2308324"/>
+          </a:xfrm>
+          <a:prstGeom prst="rect">
+            <a:avLst/>
+          </a:prstGeom>
+          <a:noFill/>
+          <a:ln>
+            <a:noFill/>
+          </a:ln>
+        </p:spPr>
+        <p:txBody>
+          <a:bodyPr anchorCtr="0" anchor="ctr" bIns="45700" lIns="91425" spcFirstLastPara="1" rIns="91425" wrap="square" tIns="45700">
+            <a:spAutoFit/>
+          </a:bodyPr>
+          <a:lstStyle/>
+          <a:p>
+            <a:pPr indent="0" lvl="0" marL="0" marR="0" rtl="0" algn="l">
+              <a:lnSpc>
+                <a:spcPct val="100000"/>
+              </a:lnSpc>
+              <a:spcBef>
+                <a:spcPts val="0"/>
+              </a:spcBef>
+              <a:spcAft>
+                <a:spcPts val="0"/>
+              </a:spcAft>
+              <a:buClr>
+                <a:schemeClr val="dk1"/>
+              </a:buClr>
+              <a:buSzPts val="1800"/>
+              <a:buFont typeface="Arial"/>
+              <a:buNone/>
+            </a:pPr>
+            <a:r>
+              <a:rPr b="0" i="0" lang="en-US" sz="1800" u="none" cap="none" strike="noStrike">
+                <a:solidFill>
+                  <a:schemeClr val="dk1"/>
+                </a:solidFill>
+                <a:latin typeface="Arial"/>
+                <a:ea typeface="Arial"/>
+                <a:cs typeface="Arial"/>
+                <a:sym typeface="Arial"/>
+              </a:rPr>
+              <a:t>Durante siete trimestres se desarrollará un sistema de información diseñado para optimizar la gestión del SPA NEW BOYS, facilitando la comunicación entre el cliente y el establecimiento al momento de agendar los servicios. Además, el sistema permitirá organizar los horarios, registrar los servicios realizados por cada profesional y apoyar el control del inventario.</a:t>
+            </a:r>
+            <a:endParaRPr b="1" i="0" sz="900" u="none" cap="none" strike="noStrike">
+              <a:solidFill>
+                <a:schemeClr val="dk1"/>
+              </a:solidFill>
+              <a:latin typeface="Arial"/>
+              <a:ea typeface="Arial"/>
+              <a:cs typeface="Arial"/>
+              <a:sym typeface="Arial"/>
+            </a:endParaRPr>
+          </a:p>
+          <a:p>
+            <a:pPr indent="0" lvl="0" marL="0" marR="0" rtl="0" algn="l">
+              <a:lnSpc>
+                <a:spcPct val="100000"/>
+              </a:lnSpc>
+              <a:spcBef>
+                <a:spcPts val="0"/>
+              </a:spcBef>
+              <a:spcAft>
+                <a:spcPts val="0"/>
+              </a:spcAft>
+              <a:buClr>
+                <a:schemeClr val="dk1"/>
+              </a:buClr>
+              <a:buSzPts val="1800"/>
+              <a:buFont typeface="Calibri"/>
+              <a:buNone/>
+            </a:pPr>
+            <a:r>
+              <a:t/>
+            </a:r>
+            <a:endParaRPr b="0" i="0" sz="1800" u="none" cap="none" strike="noStrike">
+              <a:solidFill>
+                <a:schemeClr val="dk1"/>
+              </a:solidFill>
+              <a:latin typeface="Arial"/>
+              <a:ea typeface="Arial"/>
+              <a:cs typeface="Arial"/>
+              <a:sym typeface="Arial"/>
             </a:endParaRPr>
           </a:p>
         </p:txBody>
